--- a/slides/Week3-Thu-Final-Presentations.pptx
+++ b/slides/Week3-Thu-Final-Presentations.pptx
@@ -10,7 +10,11 @@
     <p:sldId id="258" r:id="rId9"/>
     <p:sldId id="259" r:id="rId10"/>
     <p:sldId id="260" r:id="rId11"/>
-    <p:sldId id="261" r:id="rId13"/>
+    <p:sldId id="261" r:id="rId12"/>
+    <p:sldId id="262" r:id="rId13"/>
+    <p:sldId id="263" r:id="rId14"/>
+    <p:sldId id="264" r:id="rId16"/>
+    <p:sldId id="265" r:id="rId17"/>
   </p:sldIdLst>
   <p:sldSz cx="12191695" cy="6858000" type="screen4x3"/>
   <p:notesSz cx="6858000" cy="9144000"/>
@@ -507,7 +511,7 @@
           <a:lstStyle/>
           <a:p>
             <a:r>
-              <a:t>Rubric straight from the syllabus. Flag the 25% ethical-reflection AI-writing rule loudly.</a:t>
+              <a:t>Grade = summary of the 4 Canvas checkpoints (25% project) + a separate 15% presentation grade. Ethical + individual reflections must be human-written.</a:t>
             </a:r>
           </a:p>
         </p:txBody>
@@ -3599,7 +3603,7 @@
                 </a:solidFill>
                 <a:latin typeface="Courier New"/>
               </a:rPr>
-              <a:t>WEEK 3 · THURSDAY</a:t>
+              <a:t>WEEK 3 - THURSDAY</a:t>
             </a:r>
           </a:p>
         </p:txBody>
@@ -3638,7 +3642,304 @@
                 </a:solidFill>
                 <a:latin typeface="Arial"/>
               </a:rPr>
-              <a:t>Final Presentations</a:t>
+              <a:t>Demo Night: What's the solution?</a:t>
+            </a:r>
+          </a:p>
+        </p:txBody>
+      </p:sp>
+      <p:sp>
+        <p:nvSpPr>
+          <p:cNvPr id="5" name="TextBox 4"/>
+          <p:cNvSpPr txBox="1"/>
+          <p:nvPr/>
+        </p:nvSpPr>
+        <p:spPr>
+          <a:xfrm>
+            <a:off x="841248" y="4160520"/>
+            <a:ext cx="10058400" cy="457200"/>
+          </a:xfrm>
+          <a:prstGeom prst="rect">
+            <a:avLst/>
+          </a:prstGeom>
+          <a:noFill/>
+        </p:spPr>
+        <p:txBody>
+          <a:bodyPr wrap="square" anchor="t">
+            <a:spAutoFit/>
+          </a:bodyPr>
+          <a:lstStyle/>
+          <a:p>
+            <a:pPr algn="l">
+              <a:lnSpc>
+                <a:spcPct val="100000"/>
+              </a:lnSpc>
+            </a:pPr>
+            <a:r>
+              <a:rPr sz="1500" b="0">
+                <a:solidFill>
+                  <a:srgbClr val="8A94A6"/>
+                </a:solidFill>
+                <a:latin typeface="Arial"/>
+              </a:rPr>
+              <a:t>Build by day - present in the evening</a:t>
+            </a:r>
+          </a:p>
+        </p:txBody>
+      </p:sp>
+    </p:spTree>
+  </p:cSld>
+  <p:clrMapOvr>
+    <a:masterClrMapping/>
+  </p:clrMapOvr>
+</p:sld>
+</file>
+
+<file path=ppt/slides/slide10.xml><?xml version="1.0" encoding="utf-8"?>
+<p:sld xmlns:a="http://schemas.openxmlformats.org/drawingml/2006/main" xmlns:p="http://schemas.openxmlformats.org/presentationml/2006/main" xmlns:r="http://schemas.openxmlformats.org/officeDocument/2006/relationships">
+  <p:cSld>
+    <p:bg>
+      <p:bgPr>
+        <a:solidFill>
+          <a:srgbClr val="0B0E14"/>
+        </a:solidFill>
+        <a:effectLst/>
+      </p:bgPr>
+    </p:bg>
+    <p:spTree>
+      <p:nvGrpSpPr>
+        <p:cNvPr id="1" name=""/>
+        <p:cNvGrpSpPr/>
+        <p:nvPr/>
+      </p:nvGrpSpPr>
+      <p:grpSpPr/>
+      <p:sp>
+        <p:nvSpPr>
+          <p:cNvPr id="2" name="TextBox 1"/>
+          <p:cNvSpPr txBox="1"/>
+          <p:nvPr/>
+        </p:nvSpPr>
+        <p:spPr>
+          <a:xfrm>
+            <a:off x="640080" y="502920"/>
+            <a:ext cx="10058400" cy="365760"/>
+          </a:xfrm>
+          <a:prstGeom prst="rect">
+            <a:avLst/>
+          </a:prstGeom>
+          <a:noFill/>
+        </p:spPr>
+        <p:txBody>
+          <a:bodyPr wrap="square" anchor="t">
+            <a:spAutoFit/>
+          </a:bodyPr>
+          <a:lstStyle/>
+          <a:p>
+            <a:pPr algn="l">
+              <a:lnSpc>
+                <a:spcPct val="100000"/>
+              </a:lnSpc>
+            </a:pPr>
+            <a:r>
+              <a:rPr sz="1300" b="1">
+                <a:solidFill>
+                  <a:srgbClr val="00FF41"/>
+                </a:solidFill>
+                <a:latin typeface="Courier New"/>
+              </a:rPr>
+              <a:t>THAT'S A WRAP</a:t>
+            </a:r>
+          </a:p>
+        </p:txBody>
+      </p:sp>
+      <p:sp>
+        <p:nvSpPr>
+          <p:cNvPr id="3" name="Rectangle 2"/>
+          <p:cNvSpPr/>
+          <p:nvPr/>
+        </p:nvSpPr>
+        <p:spPr>
+          <a:xfrm>
+            <a:off x="640080" y="932688"/>
+            <a:ext cx="822960" cy="73152"/>
+          </a:xfrm>
+          <a:prstGeom prst="rect">
+            <a:avLst/>
+          </a:prstGeom>
+          <a:solidFill>
+            <a:srgbClr val="00FF41"/>
+          </a:solidFill>
+          <a:ln>
+            <a:noFill/>
+          </a:ln>
+          <a:effectLst/>
+        </p:spPr>
+        <p:style>
+          <a:lnRef idx="1">
+            <a:schemeClr val="accent1"/>
+          </a:lnRef>
+          <a:fillRef idx="3">
+            <a:schemeClr val="accent1"/>
+          </a:fillRef>
+          <a:effectRef idx="2">
+            <a:schemeClr val="accent1"/>
+          </a:effectRef>
+          <a:fontRef idx="minor">
+            <a:schemeClr val="lt1"/>
+          </a:fontRef>
+        </p:style>
+        <p:txBody>
+          <a:bodyPr rtlCol="0" anchor="ctr"/>
+          <a:lstStyle/>
+          <a:p>
+            <a:pPr algn="ctr"/>
+          </a:p>
+        </p:txBody>
+      </p:sp>
+      <p:sp>
+        <p:nvSpPr>
+          <p:cNvPr id="4" name="TextBox 3"/>
+          <p:cNvSpPr txBox="1"/>
+          <p:nvPr/>
+        </p:nvSpPr>
+        <p:spPr>
+          <a:xfrm>
+            <a:off x="640080" y="1188720"/>
+            <a:ext cx="10972800" cy="1097280"/>
+          </a:xfrm>
+          <a:prstGeom prst="rect">
+            <a:avLst/>
+          </a:prstGeom>
+          <a:noFill/>
+        </p:spPr>
+        <p:txBody>
+          <a:bodyPr wrap="square" anchor="t">
+            <a:spAutoFit/>
+          </a:bodyPr>
+          <a:lstStyle/>
+          <a:p>
+            <a:pPr algn="l">
+              <a:lnSpc>
+                <a:spcPct val="100000"/>
+              </a:lnSpc>
+            </a:pPr>
+            <a:r>
+              <a:rPr sz="3400" b="1">
+                <a:solidFill>
+                  <a:srgbClr val="F5F7FA"/>
+                </a:solidFill>
+                <a:latin typeface="Arial"/>
+              </a:rPr>
+              <a:t>Good code, good vibes</a:t>
+            </a:r>
+          </a:p>
+        </p:txBody>
+      </p:sp>
+      <p:sp>
+        <p:nvSpPr>
+          <p:cNvPr id="5" name="TextBox 4"/>
+          <p:cNvSpPr txBox="1"/>
+          <p:nvPr/>
+        </p:nvSpPr>
+        <p:spPr>
+          <a:xfrm>
+            <a:off x="658368" y="2286000"/>
+            <a:ext cx="10881360" cy="3657600"/>
+          </a:xfrm>
+          <a:prstGeom prst="rect">
+            <a:avLst/>
+          </a:prstGeom>
+          <a:noFill/>
+        </p:spPr>
+        <p:txBody>
+          <a:bodyPr wrap="square" anchor="t">
+            <a:spAutoFit/>
+          </a:bodyPr>
+          <a:lstStyle/>
+          <a:p>
+            <a:pPr algn="l">
+              <a:lnSpc>
+                <a:spcPct val="112000"/>
+              </a:lnSpc>
+            </a:pPr>
+            <a:r>
+              <a:rPr sz="2200" b="0">
+                <a:solidFill>
+                  <a:srgbClr val="F5F7FA"/>
+                </a:solidFill>
+                <a:latin typeface="Arial"/>
+              </a:rPr>
+              <a:t>You learned to build fast with AI - and to build right: name the value, test with real people, and own the calls you made.</a:t>
+            </a:r>
+          </a:p>
+          <a:p>
+            <a:pPr algn="l">
+              <a:lnSpc>
+                <a:spcPct val="112000"/>
+              </a:lnSpc>
+            </a:pPr>
+            <a:r>
+              <a:rPr sz="2000" b="0">
+                <a:solidFill>
+                  <a:srgbClr val="F5F7FA"/>
+                </a:solidFill>
+                <a:latin typeface="Arial"/>
+              </a:rPr>
+              <a:t/>
+            </a:r>
+          </a:p>
+          <a:p>
+            <a:pPr algn="l">
+              <a:lnSpc>
+                <a:spcPct val="112000"/>
+              </a:lnSpc>
+            </a:pPr>
+            <a:r>
+              <a:rPr sz="2000" b="1">
+                <a:solidFill>
+                  <a:srgbClr val="00FF41"/>
+                </a:solidFill>
+                <a:latin typeface="Arial"/>
+              </a:rPr>
+              <a:t>Now go make something the world keeps benefiting from.</a:t>
+            </a:r>
+          </a:p>
+        </p:txBody>
+      </p:sp>
+      <p:sp>
+        <p:nvSpPr>
+          <p:cNvPr id="6" name="TextBox 5"/>
+          <p:cNvSpPr txBox="1"/>
+          <p:nvPr/>
+        </p:nvSpPr>
+        <p:spPr>
+          <a:xfrm>
+            <a:off x="640080" y="6355080"/>
+            <a:ext cx="10972800" cy="365760"/>
+          </a:xfrm>
+          <a:prstGeom prst="rect">
+            <a:avLst/>
+          </a:prstGeom>
+          <a:noFill/>
+        </p:spPr>
+        <p:txBody>
+          <a:bodyPr wrap="square" anchor="t">
+            <a:spAutoFit/>
+          </a:bodyPr>
+          <a:lstStyle/>
+          <a:p>
+            <a:pPr algn="l">
+              <a:lnSpc>
+                <a:spcPct val="100000"/>
+              </a:lnSpc>
+            </a:pPr>
+            <a:r>
+              <a:rPr sz="1000" b="0">
+                <a:solidFill>
+                  <a:srgbClr val="5A6474"/>
+                </a:solidFill>
+                <a:latin typeface="Courier New"/>
+              </a:rPr>
+              <a:t>Good Code, Good Vibes · TECHIE 1121 · Cornell Tech · Summer 2026</a:t>
             </a:r>
           </a:p>
         </p:txBody>
@@ -3703,7 +4004,7 @@
                 </a:solidFill>
                 <a:latin typeface="Courier New"/>
               </a:rPr>
-              <a:t>THE BRIEF</a:t>
+              <a:t>THE DAY</a:t>
             </a:r>
           </a:p>
         </p:txBody>
@@ -3786,7 +4087,7 @@
                 </a:solidFill>
                 <a:latin typeface="Arial"/>
               </a:rPr>
-              <a:t>Make something that benefits someone outside the class</a:t>
+              <a:t>Build in daylight. Show it tonight.</a:t>
             </a:r>
           </a:p>
         </p:txBody>
@@ -3819,13 +4120,13 @@
               </a:lnSpc>
             </a:pPr>
             <a:r>
-              <a:rPr sz="2200" b="0">
+              <a:rPr sz="2100" b="0">
                 <a:solidFill>
                   <a:srgbClr val="F5F7FA"/>
                 </a:solidFill>
                 <a:latin typeface="Arial"/>
               </a:rPr>
-              <a:t>…and that society keeps benefiting from after class ends.</a:t>
+              <a:t>First half: build the smallest real thing from your storyboard. Evening: present it live on the monitors.</a:t>
             </a:r>
           </a:p>
           <a:p>
@@ -3851,13 +4152,13 @@
               </a:lnSpc>
             </a:pPr>
             <a:r>
-              <a:rPr sz="2000" b="0">
+              <a:rPr sz="1900" b="0">
                 <a:solidFill>
                   <a:srgbClr val="8A94A6"/>
                 </a:solidFill>
                 <a:latin typeface="Arial"/>
               </a:rPr>
-              <a:t>Today you show it, demo it live, and tell us what you learned — about the build and about the ethics.</a:t>
+              <a:t>Everything you planned Wednesday becomes an artifact people can use.</a:t>
             </a:r>
           </a:p>
         </p:txBody>
@@ -3961,7 +4262,7 @@
                 </a:solidFill>
                 <a:latin typeface="Courier New"/>
               </a:rPr>
-              <a:t>HOW TO PRESENT</a:t>
+              <a:t>BUILD</a:t>
             </a:r>
           </a:p>
         </p:txBody>
@@ -4044,7 +4345,7 @@
                 </a:solidFill>
                 <a:latin typeface="Arial"/>
               </a:rPr>
-              <a:t>Five minutes, five beats</a:t>
+              <a:t>The smallest real thing - done well</a:t>
             </a:r>
           </a:p>
         </p:txBody>
@@ -4092,7 +4393,7 @@
                 </a:solidFill>
                 <a:latin typeface="Arial"/>
               </a:rPr>
-              <a:t>The value — who it serves, and why it matters.</a:t>
+              <a:t>Build from the prompts your value tree produced Wednesday.</a:t>
             </a:r>
           </a:p>
           <a:p>
@@ -4117,7 +4418,7 @@
                 </a:solidFill>
                 <a:latin typeface="Arial"/>
               </a:rPr>
-              <a:t>The build — a live demo of the happy path.</a:t>
+              <a:t>One complete action a stranger can finish - no broken buttons, no fake features.</a:t>
             </a:r>
           </a:p>
           <a:p>
@@ -4142,7 +4443,7 @@
                 </a:solidFill>
                 <a:latin typeface="Arial"/>
               </a:rPr>
-              <a:t>What you tested — usability + values, and what changed.</a:t>
+              <a:t>The value lives in the design, not just the copy.</a:t>
             </a:r>
           </a:p>
           <a:p>
@@ -4167,32 +4468,7 @@
                 </a:solidFill>
                 <a:latin typeface="Arial"/>
               </a:rPr>
-              <a:t>The hard call — a value tension and how you resolved it.</a:t>
-            </a:r>
-          </a:p>
-          <a:p>
-            <a:pPr algn="l">
-              <a:lnSpc>
-                <a:spcPct val="112000"/>
-              </a:lnSpc>
-            </a:pPr>
-            <a:r>
-              <a:rPr sz="2000" b="1">
-                <a:solidFill>
-                  <a:srgbClr val="00FF41"/>
-                </a:solidFill>
-                <a:latin typeface="Arial"/>
-              </a:rPr>
-              <a:t>•  </a:t>
-            </a:r>
-            <a:r>
-              <a:rPr sz="2000" b="0">
-                <a:solidFill>
-                  <a:srgbClr val="F5F7FA"/>
-                </a:solidFill>
-                <a:latin typeface="Arial"/>
-              </a:rPr>
-              <a:t>What’s next — how it keeps helping after today.</a:t>
+              <a:t>Test with a couple of real people; change ONE thing on the evidence, and commit it.</a:t>
             </a:r>
           </a:p>
         </p:txBody>
@@ -4296,7 +4572,7 @@
                 </a:solidFill>
                 <a:latin typeface="Courier New"/>
               </a:rPr>
-              <a:t>HOW IT’S GRADED</a:t>
+              <a:t>THE PITCH VIDEO</a:t>
             </a:r>
           </a:p>
         </p:txBody>
@@ -4354,7 +4630,7 @@
         <p:spPr>
           <a:xfrm>
             <a:off x="640080" y="1188720"/>
-            <a:ext cx="10972800" cy="914400"/>
+            <a:ext cx="10972800" cy="1097280"/>
           </a:xfrm>
           <a:prstGeom prst="rect">
             <a:avLst/>
@@ -4373,115 +4649,27 @@
               </a:lnSpc>
             </a:pPr>
             <a:r>
-              <a:rPr sz="3200" b="1">
+              <a:rPr sz="3400" b="1">
                 <a:solidFill>
                   <a:srgbClr val="F5F7FA"/>
                 </a:solidFill>
                 <a:latin typeface="Arial"/>
               </a:rPr>
-              <a:t>What we’re looking for</a:t>
-            </a:r>
-          </a:p>
-        </p:txBody>
-      </p:sp>
-      <p:sp>
-        <p:nvSpPr>
-          <p:cNvPr id="5" name="Rounded Rectangle 4"/>
-          <p:cNvSpPr/>
-          <p:nvPr/>
-        </p:nvSpPr>
-        <p:spPr>
-          <a:xfrm>
-            <a:off x="640080" y="2468880"/>
-            <a:ext cx="3393338" cy="3383280"/>
-          </a:xfrm>
-          <a:prstGeom prst="roundRect">
-            <a:avLst/>
-          </a:prstGeom>
-          <a:solidFill>
-            <a:srgbClr val="151B26"/>
-          </a:solidFill>
-          <a:ln>
-            <a:noFill/>
-          </a:ln>
-          <a:effectLst/>
-        </p:spPr>
-        <p:style>
-          <a:lnRef idx="1">
-            <a:schemeClr val="accent1"/>
-          </a:lnRef>
-          <a:fillRef idx="3">
-            <a:schemeClr val="accent1"/>
-          </a:fillRef>
-          <a:effectRef idx="2">
-            <a:schemeClr val="accent1"/>
-          </a:effectRef>
-          <a:fontRef idx="minor">
-            <a:schemeClr val="lt1"/>
-          </a:fontRef>
-        </p:style>
-        <p:txBody>
-          <a:bodyPr rtlCol="0" anchor="ctr"/>
-          <a:lstStyle/>
-          <a:p>
-            <a:pPr algn="ctr"/>
-          </a:p>
-        </p:txBody>
-      </p:sp>
-      <p:sp>
-        <p:nvSpPr>
-          <p:cNvPr id="6" name="Rectangle 5"/>
-          <p:cNvSpPr/>
-          <p:nvPr/>
-        </p:nvSpPr>
-        <p:spPr>
-          <a:xfrm>
-            <a:off x="640080" y="2468880"/>
-            <a:ext cx="3393338" cy="82296"/>
-          </a:xfrm>
-          <a:prstGeom prst="rect">
-            <a:avLst/>
-          </a:prstGeom>
-          <a:solidFill>
-            <a:srgbClr val="00FF41"/>
-          </a:solidFill>
-          <a:ln>
-            <a:noFill/>
-          </a:ln>
-          <a:effectLst/>
-        </p:spPr>
-        <p:style>
-          <a:lnRef idx="1">
-            <a:schemeClr val="accent1"/>
-          </a:lnRef>
-          <a:fillRef idx="3">
-            <a:schemeClr val="accent1"/>
-          </a:fillRef>
-          <a:effectRef idx="2">
-            <a:schemeClr val="accent1"/>
-          </a:effectRef>
-          <a:fontRef idx="minor">
-            <a:schemeClr val="lt1"/>
-          </a:fontRef>
-        </p:style>
-        <p:txBody>
-          <a:bodyPr rtlCol="0" anchor="ctr"/>
-          <a:lstStyle/>
-          <a:p>
-            <a:pPr algn="ctr"/>
-          </a:p>
-        </p:txBody>
-      </p:sp>
-      <p:sp>
-        <p:nvSpPr>
-          <p:cNvPr id="7" name="TextBox 6"/>
+              <a:t>Short - and it showcases the artifact</a:t>
+            </a:r>
+          </a:p>
+        </p:txBody>
+      </p:sp>
+      <p:sp>
+        <p:nvSpPr>
+          <p:cNvPr id="5" name="TextBox 4"/>
           <p:cNvSpPr txBox="1"/>
           <p:nvPr/>
         </p:nvSpPr>
         <p:spPr>
           <a:xfrm>
-            <a:off x="914400" y="2788920"/>
-            <a:ext cx="2844698" cy="457200"/>
+            <a:off x="658368" y="2286000"/>
+            <a:ext cx="10881360" cy="3657600"/>
           </a:xfrm>
           <a:prstGeom prst="rect">
             <a:avLst/>
@@ -4496,512 +4684,108 @@
           <a:p>
             <a:pPr algn="l">
               <a:lnSpc>
-                <a:spcPct val="100000"/>
+                <a:spcPct val="112000"/>
               </a:lnSpc>
             </a:pPr>
             <a:r>
-              <a:rPr sz="1200" b="1">
+              <a:rPr sz="2000" b="1">
                 <a:solidFill>
                   <a:srgbClr val="00FF41"/>
                 </a:solidFill>
-                <a:latin typeface="Courier New"/>
-              </a:rPr>
-              <a:t>GOOD VIBES · 20%</a:t>
-            </a:r>
-          </a:p>
-        </p:txBody>
-      </p:sp>
-      <p:sp>
-        <p:nvSpPr>
-          <p:cNvPr id="8" name="TextBox 7"/>
-          <p:cNvSpPr txBox="1"/>
-          <p:nvPr/>
-        </p:nvSpPr>
-        <p:spPr>
-          <a:xfrm>
-            <a:off x="914400" y="3246120"/>
-            <a:ext cx="2844698" cy="822960"/>
-          </a:xfrm>
-          <a:prstGeom prst="rect">
-            <a:avLst/>
-          </a:prstGeom>
-          <a:noFill/>
-        </p:spPr>
-        <p:txBody>
-          <a:bodyPr wrap="square" anchor="t">
-            <a:spAutoFit/>
-          </a:bodyPr>
-          <a:lstStyle/>
+                <a:latin typeface="Arial"/>
+              </a:rPr>
+              <a:t>•  </a:t>
+            </a:r>
+            <a:r>
+              <a:rPr sz="2000" b="0">
+                <a:solidFill>
+                  <a:srgbClr val="F5F7FA"/>
+                </a:solidFill>
+                <a:latin typeface="Arial"/>
+              </a:rPr>
+              <a:t>Make a short pitch that shows your vibe-coded thing in action.</a:t>
+            </a:r>
+          </a:p>
           <a:p>
             <a:pPr algn="l">
               <a:lnSpc>
-                <a:spcPct val="100000"/>
+                <a:spcPct val="112000"/>
               </a:lnSpc>
             </a:pPr>
             <a:r>
               <a:rPr sz="2000" b="1">
                 <a:solidFill>
+                  <a:srgbClr val="00FF41"/>
+                </a:solidFill>
+                <a:latin typeface="Arial"/>
+              </a:rPr>
+              <a:t>•  </a:t>
+            </a:r>
+            <a:r>
+              <a:rPr sz="2000" b="0">
+                <a:solidFill>
                   <a:srgbClr val="F5F7FA"/>
                 </a:solidFill>
                 <a:latin typeface="Arial"/>
               </a:rPr>
-              <a:t>The idea</a:t>
-            </a:r>
-          </a:p>
-        </p:txBody>
-      </p:sp>
-      <p:sp>
-        <p:nvSpPr>
-          <p:cNvPr id="9" name="TextBox 8"/>
-          <p:cNvSpPr txBox="1"/>
-          <p:nvPr/>
-        </p:nvSpPr>
-        <p:spPr>
-          <a:xfrm>
-            <a:off x="914400" y="4114800"/>
-            <a:ext cx="2844698" cy="1554480"/>
-          </a:xfrm>
-          <a:prstGeom prst="rect">
-            <a:avLst/>
-          </a:prstGeom>
-          <a:noFill/>
-        </p:spPr>
-        <p:txBody>
-          <a:bodyPr wrap="square" anchor="t">
-            <a:spAutoFit/>
-          </a:bodyPr>
-          <a:lstStyle/>
+              <a:t>AI video: Google Veo 3.1 (Flow), Runway, Kling, or Pika. (OpenAI retired the Sora app in 2026.)</a:t>
+            </a:r>
+          </a:p>
           <a:p>
             <a:pPr algn="l">
               <a:lnSpc>
-                <a:spcPct val="110000"/>
+                <a:spcPct val="112000"/>
               </a:lnSpc>
             </a:pPr>
             <a:r>
-              <a:rPr sz="1500" b="0">
-                <a:solidFill>
-                  <a:srgbClr val="8A94A6"/>
+              <a:rPr sz="2000" b="1">
+                <a:solidFill>
+                  <a:srgbClr val="00FF41"/>
                 </a:solidFill>
                 <a:latin typeface="Arial"/>
               </a:rPr>
-              <a:t>Novelty and the case for why you built it.</a:t>
-            </a:r>
-          </a:p>
-        </p:txBody>
-      </p:sp>
-      <p:sp>
-        <p:nvSpPr>
-          <p:cNvPr id="10" name="Rounded Rectangle 9"/>
-          <p:cNvSpPr/>
-          <p:nvPr/>
-        </p:nvSpPr>
-        <p:spPr>
-          <a:xfrm>
-            <a:off x="4399178" y="2468880"/>
-            <a:ext cx="3393338" cy="3383280"/>
-          </a:xfrm>
-          <a:prstGeom prst="roundRect">
-            <a:avLst/>
-          </a:prstGeom>
-          <a:solidFill>
-            <a:srgbClr val="151B26"/>
-          </a:solidFill>
-          <a:ln>
-            <a:noFill/>
-          </a:ln>
-          <a:effectLst/>
-        </p:spPr>
-        <p:style>
-          <a:lnRef idx="1">
-            <a:schemeClr val="accent1"/>
-          </a:lnRef>
-          <a:fillRef idx="3">
-            <a:schemeClr val="accent1"/>
-          </a:fillRef>
-          <a:effectRef idx="2">
-            <a:schemeClr val="accent1"/>
-          </a:effectRef>
-          <a:fontRef idx="minor">
-            <a:schemeClr val="lt1"/>
-          </a:fontRef>
-        </p:style>
-        <p:txBody>
-          <a:bodyPr rtlCol="0" anchor="ctr"/>
-          <a:lstStyle/>
-          <a:p>
-            <a:pPr algn="ctr"/>
-          </a:p>
-        </p:txBody>
-      </p:sp>
-      <p:sp>
-        <p:nvSpPr>
-          <p:cNvPr id="11" name="Rectangle 10"/>
-          <p:cNvSpPr/>
-          <p:nvPr/>
-        </p:nvSpPr>
-        <p:spPr>
-          <a:xfrm>
-            <a:off x="4399178" y="2468880"/>
-            <a:ext cx="3393338" cy="82296"/>
-          </a:xfrm>
-          <a:prstGeom prst="rect">
-            <a:avLst/>
-          </a:prstGeom>
-          <a:solidFill>
-            <a:srgbClr val="00FF41"/>
-          </a:solidFill>
-          <a:ln>
-            <a:noFill/>
-          </a:ln>
-          <a:effectLst/>
-        </p:spPr>
-        <p:style>
-          <a:lnRef idx="1">
-            <a:schemeClr val="accent1"/>
-          </a:lnRef>
-          <a:fillRef idx="3">
-            <a:schemeClr val="accent1"/>
-          </a:fillRef>
-          <a:effectRef idx="2">
-            <a:schemeClr val="accent1"/>
-          </a:effectRef>
-          <a:fontRef idx="minor">
-            <a:schemeClr val="lt1"/>
-          </a:fontRef>
-        </p:style>
-        <p:txBody>
-          <a:bodyPr rtlCol="0" anchor="ctr"/>
-          <a:lstStyle/>
-          <a:p>
-            <a:pPr algn="ctr"/>
-          </a:p>
-        </p:txBody>
-      </p:sp>
-      <p:sp>
-        <p:nvSpPr>
-          <p:cNvPr id="12" name="TextBox 11"/>
-          <p:cNvSpPr txBox="1"/>
-          <p:nvPr/>
-        </p:nvSpPr>
-        <p:spPr>
-          <a:xfrm>
-            <a:off x="4673498" y="2788920"/>
-            <a:ext cx="2844698" cy="457200"/>
-          </a:xfrm>
-          <a:prstGeom prst="rect">
-            <a:avLst/>
-          </a:prstGeom>
-          <a:noFill/>
-        </p:spPr>
-        <p:txBody>
-          <a:bodyPr wrap="square" anchor="t">
-            <a:spAutoFit/>
-          </a:bodyPr>
-          <a:lstStyle/>
+              <a:t>•  </a:t>
+            </a:r>
+            <a:r>
+              <a:rPr sz="2000" b="0">
+                <a:solidFill>
+                  <a:srgbClr val="F5F7FA"/>
+                </a:solidFill>
+                <a:latin typeface="Arial"/>
+              </a:rPr>
+              <a:t>Or an animated walkthrough, or a plain screen recording - the artifact is the star.</a:t>
+            </a:r>
+          </a:p>
           <a:p>
             <a:pPr algn="l">
               <a:lnSpc>
-                <a:spcPct val="100000"/>
+                <a:spcPct val="112000"/>
               </a:lnSpc>
             </a:pPr>
             <a:r>
-              <a:rPr sz="1200" b="1">
+              <a:rPr sz="2000" b="1">
                 <a:solidFill>
                   <a:srgbClr val="00FF41"/>
                 </a:solidFill>
-                <a:latin typeface="Courier New"/>
-              </a:rPr>
-              <a:t>GOOD CODE · 20%</a:t>
-            </a:r>
-          </a:p>
-        </p:txBody>
-      </p:sp>
-      <p:sp>
-        <p:nvSpPr>
-          <p:cNvPr id="13" name="TextBox 12"/>
-          <p:cNvSpPr txBox="1"/>
-          <p:nvPr/>
-        </p:nvSpPr>
-        <p:spPr>
-          <a:xfrm>
-            <a:off x="4673498" y="3246120"/>
-            <a:ext cx="2844698" cy="822960"/>
-          </a:xfrm>
-          <a:prstGeom prst="rect">
-            <a:avLst/>
-          </a:prstGeom>
-          <a:noFill/>
-        </p:spPr>
-        <p:txBody>
-          <a:bodyPr wrap="square" anchor="t">
-            <a:spAutoFit/>
-          </a:bodyPr>
-          <a:lstStyle/>
-          <a:p>
-            <a:pPr algn="l">
-              <a:lnSpc>
-                <a:spcPct val="100000"/>
-              </a:lnSpc>
-            </a:pPr>
-            <a:r>
-              <a:rPr sz="2000" b="1">
+                <a:latin typeface="Arial"/>
+              </a:rPr>
+              <a:t>•  </a:t>
+            </a:r>
+            <a:r>
+              <a:rPr sz="2000" b="0">
                 <a:solidFill>
                   <a:srgbClr val="F5F7FA"/>
                 </a:solidFill>
                 <a:latin typeface="Arial"/>
               </a:rPr>
-              <a:t>The build</a:t>
-            </a:r>
-          </a:p>
-        </p:txBody>
-      </p:sp>
-      <p:sp>
-        <p:nvSpPr>
-          <p:cNvPr id="14" name="TextBox 13"/>
-          <p:cNvSpPr txBox="1"/>
-          <p:nvPr/>
-        </p:nvSpPr>
-        <p:spPr>
-          <a:xfrm>
-            <a:off x="4673498" y="4114800"/>
-            <a:ext cx="2844698" cy="1554480"/>
-          </a:xfrm>
-          <a:prstGeom prst="rect">
-            <a:avLst/>
-          </a:prstGeom>
-          <a:noFill/>
-        </p:spPr>
-        <p:txBody>
-          <a:bodyPr wrap="square" anchor="t">
-            <a:spAutoFit/>
-          </a:bodyPr>
-          <a:lstStyle/>
-          <a:p>
-            <a:pPr algn="l">
-              <a:lnSpc>
-                <a:spcPct val="110000"/>
-              </a:lnSpc>
-            </a:pPr>
-            <a:r>
-              <a:rPr sz="1500" b="0">
-                <a:solidFill>
-                  <a:srgbClr val="8A94A6"/>
-                </a:solidFill>
-                <a:latin typeface="Arial"/>
-              </a:rPr>
-              <a:t>Functionality and technical execution.</a:t>
-            </a:r>
-          </a:p>
-        </p:txBody>
-      </p:sp>
-      <p:sp>
-        <p:nvSpPr>
-          <p:cNvPr id="15" name="Rounded Rectangle 14"/>
-          <p:cNvSpPr/>
-          <p:nvPr/>
-        </p:nvSpPr>
-        <p:spPr>
-          <a:xfrm>
-            <a:off x="8158276" y="2468880"/>
-            <a:ext cx="3393338" cy="3383280"/>
-          </a:xfrm>
-          <a:prstGeom prst="roundRect">
-            <a:avLst/>
-          </a:prstGeom>
-          <a:solidFill>
-            <a:srgbClr val="151B26"/>
-          </a:solidFill>
-          <a:ln>
-            <a:noFill/>
-          </a:ln>
-          <a:effectLst/>
-        </p:spPr>
-        <p:style>
-          <a:lnRef idx="1">
-            <a:schemeClr val="accent1"/>
-          </a:lnRef>
-          <a:fillRef idx="3">
-            <a:schemeClr val="accent1"/>
-          </a:fillRef>
-          <a:effectRef idx="2">
-            <a:schemeClr val="accent1"/>
-          </a:effectRef>
-          <a:fontRef idx="minor">
-            <a:schemeClr val="lt1"/>
-          </a:fontRef>
-        </p:style>
-        <p:txBody>
-          <a:bodyPr rtlCol="0" anchor="ctr"/>
-          <a:lstStyle/>
-          <a:p>
-            <a:pPr algn="ctr"/>
-          </a:p>
-        </p:txBody>
-      </p:sp>
-      <p:sp>
-        <p:nvSpPr>
-          <p:cNvPr id="16" name="Rectangle 15"/>
-          <p:cNvSpPr/>
-          <p:nvPr/>
-        </p:nvSpPr>
-        <p:spPr>
-          <a:xfrm>
-            <a:off x="8158276" y="2468880"/>
-            <a:ext cx="3393338" cy="82296"/>
-          </a:xfrm>
-          <a:prstGeom prst="rect">
-            <a:avLst/>
-          </a:prstGeom>
-          <a:solidFill>
-            <a:srgbClr val="00FF41"/>
-          </a:solidFill>
-          <a:ln>
-            <a:noFill/>
-          </a:ln>
-          <a:effectLst/>
-        </p:spPr>
-        <p:style>
-          <a:lnRef idx="1">
-            <a:schemeClr val="accent1"/>
-          </a:lnRef>
-          <a:fillRef idx="3">
-            <a:schemeClr val="accent1"/>
-          </a:fillRef>
-          <a:effectRef idx="2">
-            <a:schemeClr val="accent1"/>
-          </a:effectRef>
-          <a:fontRef idx="minor">
-            <a:schemeClr val="lt1"/>
-          </a:fontRef>
-        </p:style>
-        <p:txBody>
-          <a:bodyPr rtlCol="0" anchor="ctr"/>
-          <a:lstStyle/>
-          <a:p>
-            <a:pPr algn="ctr"/>
-          </a:p>
-        </p:txBody>
-      </p:sp>
-      <p:sp>
-        <p:nvSpPr>
-          <p:cNvPr id="17" name="TextBox 16"/>
-          <p:cNvSpPr txBox="1"/>
-          <p:nvPr/>
-        </p:nvSpPr>
-        <p:spPr>
-          <a:xfrm>
-            <a:off x="8432596" y="2788920"/>
-            <a:ext cx="2844698" cy="457200"/>
-          </a:xfrm>
-          <a:prstGeom prst="rect">
-            <a:avLst/>
-          </a:prstGeom>
-          <a:noFill/>
-        </p:spPr>
-        <p:txBody>
-          <a:bodyPr wrap="square" anchor="t">
-            <a:spAutoFit/>
-          </a:bodyPr>
-          <a:lstStyle/>
-          <a:p>
-            <a:pPr algn="l">
-              <a:lnSpc>
-                <a:spcPct val="100000"/>
-              </a:lnSpc>
-            </a:pPr>
-            <a:r>
-              <a:rPr sz="1200" b="1">
-                <a:solidFill>
-                  <a:srgbClr val="00FF41"/>
-                </a:solidFill>
-                <a:latin typeface="Courier New"/>
-              </a:rPr>
-              <a:t>LIVE DEMO · 15%</a:t>
-            </a:r>
-          </a:p>
-        </p:txBody>
-      </p:sp>
-      <p:sp>
-        <p:nvSpPr>
-          <p:cNvPr id="18" name="TextBox 17"/>
-          <p:cNvSpPr txBox="1"/>
-          <p:nvPr/>
-        </p:nvSpPr>
-        <p:spPr>
-          <a:xfrm>
-            <a:off x="8432596" y="3246120"/>
-            <a:ext cx="2844698" cy="822960"/>
-          </a:xfrm>
-          <a:prstGeom prst="rect">
-            <a:avLst/>
-          </a:prstGeom>
-          <a:noFill/>
-        </p:spPr>
-        <p:txBody>
-          <a:bodyPr wrap="square" anchor="t">
-            <a:spAutoFit/>
-          </a:bodyPr>
-          <a:lstStyle/>
-          <a:p>
-            <a:pPr algn="l">
-              <a:lnSpc>
-                <a:spcPct val="100000"/>
-              </a:lnSpc>
-            </a:pPr>
-            <a:r>
-              <a:rPr sz="2000" b="1">
-                <a:solidFill>
-                  <a:srgbClr val="F5F7FA"/>
-                </a:solidFill>
-                <a:latin typeface="Arial"/>
-              </a:rPr>
-              <a:t>With users</a:t>
-            </a:r>
-          </a:p>
-        </p:txBody>
-      </p:sp>
-      <p:sp>
-        <p:nvSpPr>
-          <p:cNvPr id="19" name="TextBox 18"/>
-          <p:cNvSpPr txBox="1"/>
-          <p:nvPr/>
-        </p:nvSpPr>
-        <p:spPr>
-          <a:xfrm>
-            <a:off x="8432596" y="4114800"/>
-            <a:ext cx="2844698" cy="1554480"/>
-          </a:xfrm>
-          <a:prstGeom prst="rect">
-            <a:avLst/>
-          </a:prstGeom>
-          <a:noFill/>
-        </p:spPr>
-        <p:txBody>
-          <a:bodyPr wrap="square" anchor="t">
-            <a:spAutoFit/>
-          </a:bodyPr>
-          <a:lstStyle/>
-          <a:p>
-            <a:pPr algn="l">
-              <a:lnSpc>
-                <a:spcPct val="110000"/>
-              </a:lnSpc>
-            </a:pPr>
-            <a:r>
-              <a:rPr sz="1500" b="0">
-                <a:solidFill>
-                  <a:srgbClr val="8A94A6"/>
-                </a:solidFill>
-                <a:latin typeface="Arial"/>
-              </a:rPr>
-              <a:t>Plan, test, and documentation with real users.</a:t>
-            </a:r>
-          </a:p>
-        </p:txBody>
-      </p:sp>
-      <p:sp>
-        <p:nvSpPr>
-          <p:cNvPr id="20" name="TextBox 19"/>
+              <a:t>Put it in presentation/ and link it in your report.</a:t>
+            </a:r>
+          </a:p>
+        </p:txBody>
+      </p:sp>
+      <p:sp>
+        <p:nvSpPr>
+          <p:cNvPr id="6" name="TextBox 5"/>
           <p:cNvSpPr txBox="1"/>
           <p:nvPr/>
         </p:nvSpPr>
@@ -5098,7 +4882,7 @@
                 </a:solidFill>
                 <a:latin typeface="Courier New"/>
               </a:rPr>
-              <a:t>HOW IT’S GRADED</a:t>
+              <a:t>SCREENSHOT SLOT</a:t>
             </a:r>
           </a:p>
         </p:txBody>
@@ -5175,13 +4959,13 @@
               </a:lnSpc>
             </a:pPr>
             <a:r>
-              <a:rPr sz="3200" b="1">
+              <a:rPr sz="3000" b="1">
                 <a:solidFill>
                   <a:srgbClr val="F5F7FA"/>
                 </a:solidFill>
                 <a:latin typeface="Arial"/>
               </a:rPr>
-              <a:t>…and the two that carry the most weight</a:t>
+              <a:t>Show a build / pitch still</a:t>
             </a:r>
           </a:p>
         </p:txBody>
@@ -5194,8 +4978,8 @@
         </p:nvSpPr>
         <p:spPr>
           <a:xfrm>
-            <a:off x="640080" y="2468880"/>
-            <a:ext cx="5272887" cy="3383280"/>
+            <a:off x="2194560" y="2331720"/>
+            <a:ext cx="7772400" cy="3566160"/>
           </a:xfrm>
           <a:prstGeom prst="roundRect">
             <a:avLst/>
@@ -5203,8 +4987,11 @@
           <a:solidFill>
             <a:srgbClr val="151B26"/>
           </a:solidFill>
-          <a:ln>
-            <a:noFill/>
+          <a:ln w="19050">
+            <a:solidFill>
+              <a:srgbClr val="00FF41"/>
+            </a:solidFill>
+            <a:prstDash val="dash"/>
           </a:ln>
           <a:effectLst/>
         </p:spPr>
@@ -5232,58 +5019,14 @@
       </p:sp>
       <p:sp>
         <p:nvSpPr>
-          <p:cNvPr id="6" name="Rectangle 5"/>
-          <p:cNvSpPr/>
-          <p:nvPr/>
-        </p:nvSpPr>
-        <p:spPr>
-          <a:xfrm>
-            <a:off x="640080" y="2468880"/>
-            <a:ext cx="5272887" cy="82296"/>
-          </a:xfrm>
-          <a:prstGeom prst="rect">
-            <a:avLst/>
-          </a:prstGeom>
-          <a:solidFill>
-            <a:srgbClr val="00FF41"/>
-          </a:solidFill>
-          <a:ln>
-            <a:noFill/>
-          </a:ln>
-          <a:effectLst/>
-        </p:spPr>
-        <p:style>
-          <a:lnRef idx="1">
-            <a:schemeClr val="accent1"/>
-          </a:lnRef>
-          <a:fillRef idx="3">
-            <a:schemeClr val="accent1"/>
-          </a:fillRef>
-          <a:effectRef idx="2">
-            <a:schemeClr val="accent1"/>
-          </a:effectRef>
-          <a:fontRef idx="minor">
-            <a:schemeClr val="lt1"/>
-          </a:fontRef>
-        </p:style>
-        <p:txBody>
-          <a:bodyPr rtlCol="0" anchor="ctr"/>
-          <a:lstStyle/>
-          <a:p>
-            <a:pPr algn="ctr"/>
-          </a:p>
-        </p:txBody>
-      </p:sp>
-      <p:sp>
-        <p:nvSpPr>
-          <p:cNvPr id="7" name="TextBox 6"/>
+          <p:cNvPr id="6" name="TextBox 5"/>
           <p:cNvSpPr txBox="1"/>
           <p:nvPr/>
         </p:nvSpPr>
         <p:spPr>
           <a:xfrm>
-            <a:off x="914400" y="2788920"/>
-            <a:ext cx="4724247" cy="457200"/>
+            <a:off x="2194560" y="3383280"/>
+            <a:ext cx="7772400" cy="731520"/>
           </a:xfrm>
           <a:prstGeom prst="rect">
             <a:avLst/>
@@ -5296,33 +5039,33 @@
           </a:bodyPr>
           <a:lstStyle/>
           <a:p>
-            <a:pPr algn="l">
+            <a:pPr algn="ctr">
               <a:lnSpc>
                 <a:spcPct val="100000"/>
               </a:lnSpc>
             </a:pPr>
             <a:r>
-              <a:rPr sz="1200" b="1">
+              <a:rPr sz="2200" b="1">
                 <a:solidFill>
                   <a:srgbClr val="00FF41"/>
                 </a:solidFill>
                 <a:latin typeface="Courier New"/>
               </a:rPr>
-              <a:t>DEEP ETHICAL REFLECTION · 25%</a:t>
-            </a:r>
-          </a:p>
-        </p:txBody>
-      </p:sp>
-      <p:sp>
-        <p:nvSpPr>
-          <p:cNvPr id="8" name="TextBox 7"/>
+              <a:t>[ demo screenshot or pitch still goes here ]</a:t>
+            </a:r>
+          </a:p>
+        </p:txBody>
+      </p:sp>
+      <p:sp>
+        <p:nvSpPr>
+          <p:cNvPr id="7" name="TextBox 6"/>
           <p:cNvSpPr txBox="1"/>
           <p:nvPr/>
         </p:nvSpPr>
         <p:spPr>
           <a:xfrm>
-            <a:off x="914400" y="3246120"/>
-            <a:ext cx="4724247" cy="822960"/>
+            <a:off x="2194560" y="4114800"/>
+            <a:ext cx="7772400" cy="731520"/>
           </a:xfrm>
           <a:prstGeom prst="rect">
             <a:avLst/>
@@ -5335,270 +5078,26 @@
           </a:bodyPr>
           <a:lstStyle/>
           <a:p>
-            <a:pPr algn="l">
+            <a:pPr algn="ctr">
               <a:lnSpc>
                 <a:spcPct val="100000"/>
               </a:lnSpc>
             </a:pPr>
             <a:r>
-              <a:rPr sz="2000" b="1">
-                <a:solidFill>
-                  <a:srgbClr val="F5F7FA"/>
+              <a:rPr sz="1400" b="0">
+                <a:solidFill>
+                  <a:srgbClr val="8A94A6"/>
                 </a:solidFill>
                 <a:latin typeface="Arial"/>
               </a:rPr>
-              <a:t>Your own words</a:t>
-            </a:r>
-          </a:p>
-        </p:txBody>
-      </p:sp>
-      <p:sp>
-        <p:nvSpPr>
-          <p:cNvPr id="9" name="TextBox 8"/>
-          <p:cNvSpPr txBox="1"/>
-          <p:nvPr/>
-        </p:nvSpPr>
-        <p:spPr>
-          <a:xfrm>
-            <a:off x="914400" y="4114800"/>
-            <a:ext cx="4724247" cy="1554480"/>
-          </a:xfrm>
-          <a:prstGeom prst="rect">
-            <a:avLst/>
-          </a:prstGeom>
-          <a:noFill/>
-        </p:spPr>
-        <p:txBody>
-          <a:bodyPr wrap="square" anchor="t">
-            <a:spAutoFit/>
-          </a:bodyPr>
-          <a:lstStyle/>
-          <a:p>
-            <a:pPr algn="l">
-              <a:lnSpc>
-                <a:spcPct val="110000"/>
-              </a:lnSpc>
-            </a:pPr>
-            <a:r>
-              <a:rPr sz="1500" b="0">
-                <a:solidFill>
-                  <a:srgbClr val="8A94A6"/>
-                </a:solidFill>
-                <a:latin typeface="Arial"/>
-              </a:rPr>
-              <a:t>The values thinking — AI writing is impermissible here (grammar only).</a:t>
-            </a:r>
-          </a:p>
-        </p:txBody>
-      </p:sp>
-      <p:sp>
-        <p:nvSpPr>
-          <p:cNvPr id="10" name="Rounded Rectangle 9"/>
-          <p:cNvSpPr/>
-          <p:nvPr/>
-        </p:nvSpPr>
-        <p:spPr>
-          <a:xfrm>
-            <a:off x="6278727" y="2468880"/>
-            <a:ext cx="5272887" cy="3383280"/>
-          </a:xfrm>
-          <a:prstGeom prst="roundRect">
-            <a:avLst/>
-          </a:prstGeom>
-          <a:solidFill>
-            <a:srgbClr val="151B26"/>
-          </a:solidFill>
-          <a:ln>
-            <a:noFill/>
-          </a:ln>
-          <a:effectLst/>
-        </p:spPr>
-        <p:style>
-          <a:lnRef idx="1">
-            <a:schemeClr val="accent1"/>
-          </a:lnRef>
-          <a:fillRef idx="3">
-            <a:schemeClr val="accent1"/>
-          </a:fillRef>
-          <a:effectRef idx="2">
-            <a:schemeClr val="accent1"/>
-          </a:effectRef>
-          <a:fontRef idx="minor">
-            <a:schemeClr val="lt1"/>
-          </a:fontRef>
-        </p:style>
-        <p:txBody>
-          <a:bodyPr rtlCol="0" anchor="ctr"/>
-          <a:lstStyle/>
-          <a:p>
-            <a:pPr algn="ctr"/>
-          </a:p>
-        </p:txBody>
-      </p:sp>
-      <p:sp>
-        <p:nvSpPr>
-          <p:cNvPr id="11" name="Rectangle 10"/>
-          <p:cNvSpPr/>
-          <p:nvPr/>
-        </p:nvSpPr>
-        <p:spPr>
-          <a:xfrm>
-            <a:off x="6278727" y="2468880"/>
-            <a:ext cx="5272887" cy="82296"/>
-          </a:xfrm>
-          <a:prstGeom prst="rect">
-            <a:avLst/>
-          </a:prstGeom>
-          <a:solidFill>
-            <a:srgbClr val="00FF41"/>
-          </a:solidFill>
-          <a:ln>
-            <a:noFill/>
-          </a:ln>
-          <a:effectLst/>
-        </p:spPr>
-        <p:style>
-          <a:lnRef idx="1">
-            <a:schemeClr val="accent1"/>
-          </a:lnRef>
-          <a:fillRef idx="3">
-            <a:schemeClr val="accent1"/>
-          </a:fillRef>
-          <a:effectRef idx="2">
-            <a:schemeClr val="accent1"/>
-          </a:effectRef>
-          <a:fontRef idx="minor">
-            <a:schemeClr val="lt1"/>
-          </a:fontRef>
-        </p:style>
-        <p:txBody>
-          <a:bodyPr rtlCol="0" anchor="ctr"/>
-          <a:lstStyle/>
-          <a:p>
-            <a:pPr algn="ctr"/>
-          </a:p>
-        </p:txBody>
-      </p:sp>
-      <p:sp>
-        <p:nvSpPr>
-          <p:cNvPr id="12" name="TextBox 11"/>
-          <p:cNvSpPr txBox="1"/>
-          <p:nvPr/>
-        </p:nvSpPr>
-        <p:spPr>
-          <a:xfrm>
-            <a:off x="6553047" y="2788920"/>
-            <a:ext cx="4724247" cy="457200"/>
-          </a:xfrm>
-          <a:prstGeom prst="rect">
-            <a:avLst/>
-          </a:prstGeom>
-          <a:noFill/>
-        </p:spPr>
-        <p:txBody>
-          <a:bodyPr wrap="square" anchor="t">
-            <a:spAutoFit/>
-          </a:bodyPr>
-          <a:lstStyle/>
-          <a:p>
-            <a:pPr algn="l">
-              <a:lnSpc>
-                <a:spcPct val="100000"/>
-              </a:lnSpc>
-            </a:pPr>
-            <a:r>
-              <a:rPr sz="1200" b="1">
-                <a:solidFill>
-                  <a:srgbClr val="00FF41"/>
-                </a:solidFill>
-                <a:latin typeface="Courier New"/>
-              </a:rPr>
-              <a:t>COMMUNICATION · 20%</a:t>
-            </a:r>
-          </a:p>
-        </p:txBody>
-      </p:sp>
-      <p:sp>
-        <p:nvSpPr>
-          <p:cNvPr id="13" name="TextBox 12"/>
-          <p:cNvSpPr txBox="1"/>
-          <p:nvPr/>
-        </p:nvSpPr>
-        <p:spPr>
-          <a:xfrm>
-            <a:off x="6553047" y="3246120"/>
-            <a:ext cx="4724247" cy="822960"/>
-          </a:xfrm>
-          <a:prstGeom prst="rect">
-            <a:avLst/>
-          </a:prstGeom>
-          <a:noFill/>
-        </p:spPr>
-        <p:txBody>
-          <a:bodyPr wrap="square" anchor="t">
-            <a:spAutoFit/>
-          </a:bodyPr>
-          <a:lstStyle/>
-          <a:p>
-            <a:pPr algn="l">
-              <a:lnSpc>
-                <a:spcPct val="100000"/>
-              </a:lnSpc>
-            </a:pPr>
-            <a:r>
-              <a:rPr sz="2000" b="1">
-                <a:solidFill>
-                  <a:srgbClr val="F5F7FA"/>
-                </a:solidFill>
-                <a:latin typeface="Arial"/>
-              </a:rPr>
-              <a:t>The story</a:t>
-            </a:r>
-          </a:p>
-        </p:txBody>
-      </p:sp>
-      <p:sp>
-        <p:nvSpPr>
-          <p:cNvPr id="14" name="TextBox 13"/>
-          <p:cNvSpPr txBox="1"/>
-          <p:nvPr/>
-        </p:nvSpPr>
-        <p:spPr>
-          <a:xfrm>
-            <a:off x="6553047" y="4114800"/>
-            <a:ext cx="4724247" cy="1554480"/>
-          </a:xfrm>
-          <a:prstGeom prst="rect">
-            <a:avLst/>
-          </a:prstGeom>
-          <a:noFill/>
-        </p:spPr>
-        <p:txBody>
-          <a:bodyPr wrap="square" anchor="t">
-            <a:spAutoFit/>
-          </a:bodyPr>
-          <a:lstStyle/>
-          <a:p>
-            <a:pPr algn="l">
-              <a:lnSpc>
-                <a:spcPct val="110000"/>
-              </a:lnSpc>
-            </a:pPr>
-            <a:r>
-              <a:rPr sz="1500" b="0">
-                <a:solidFill>
-                  <a:srgbClr val="8A94A6"/>
-                </a:solidFill>
-                <a:latin typeface="Arial"/>
-              </a:rPr>
-              <a:t>Text, video, and photos documenting capability and process.</a:t>
-            </a:r>
-          </a:p>
-        </p:txBody>
-      </p:sp>
-      <p:sp>
-        <p:nvSpPr>
-          <p:cNvPr id="15" name="TextBox 14"/>
+              <a:t>the app in use, or a frame from the pitch video</a:t>
+            </a:r>
+          </a:p>
+        </p:txBody>
+      </p:sp>
+      <p:sp>
+        <p:nvSpPr>
+          <p:cNvPr id="8" name="TextBox 7"/>
           <p:cNvSpPr txBox="1"/>
           <p:nvPr/>
         </p:nvSpPr>
@@ -5695,7 +5194,7 @@
                 </a:solidFill>
                 <a:latin typeface="Courier New"/>
               </a:rPr>
-              <a:t>THAT’S A WRAP</a:t>
+              <a:t>HOW TO PRESENT</a:t>
             </a:r>
           </a:p>
         </p:txBody>
@@ -5778,7 +5277,7 @@
                 </a:solidFill>
                 <a:latin typeface="Arial"/>
               </a:rPr>
-              <a:t>Good code, good vibes</a:t>
+              <a:t>Five beats on the monitor</a:t>
             </a:r>
           </a:p>
         </p:txBody>
@@ -5811,13 +5310,22 @@
               </a:lnSpc>
             </a:pPr>
             <a:r>
-              <a:rPr sz="2200" b="0">
+              <a:rPr sz="2000" b="1">
+                <a:solidFill>
+                  <a:srgbClr val="00FF41"/>
+                </a:solidFill>
+                <a:latin typeface="Arial"/>
+              </a:rPr>
+              <a:t>•  </a:t>
+            </a:r>
+            <a:r>
+              <a:rPr sz="2000" b="0">
                 <a:solidFill>
                   <a:srgbClr val="F5F7FA"/>
                 </a:solidFill>
                 <a:latin typeface="Arial"/>
               </a:rPr>
-              <a:t>You learned to build fast with AI — and to build right: to name the values, test with real people, and own the calls you made.</a:t>
+              <a:t>The artifact - a live demo of the happy path.</a:t>
             </a:r>
           </a:p>
           <a:p>
@@ -5827,13 +5335,22 @@
               </a:lnSpc>
             </a:pPr>
             <a:r>
+              <a:rPr sz="2000" b="1">
+                <a:solidFill>
+                  <a:srgbClr val="00FF41"/>
+                </a:solidFill>
+                <a:latin typeface="Arial"/>
+              </a:rPr>
+              <a:t>•  </a:t>
+            </a:r>
+            <a:r>
               <a:rPr sz="2000" b="0">
                 <a:solidFill>
                   <a:srgbClr val="F5F7FA"/>
                 </a:solidFill>
                 <a:latin typeface="Arial"/>
               </a:rPr>
-              <a:t/>
+              <a:t>The value - what it operationalizes, and for whom outside the class.</a:t>
             </a:r>
           </a:p>
           <a:p>
@@ -5849,7 +5366,1928 @@
                 </a:solidFill>
                 <a:latin typeface="Arial"/>
               </a:rPr>
-              <a:t>Now go make something the world keeps benefiting from.</a:t>
+              <a:t>•  </a:t>
+            </a:r>
+            <a:r>
+              <a:rPr sz="2000" b="0">
+                <a:solidFill>
+                  <a:srgbClr val="F5F7FA"/>
+                </a:solidFill>
+                <a:latin typeface="Arial"/>
+              </a:rPr>
+              <a:t>The evidence - what you tested (Mon usability, Tue value) and what changed.</a:t>
+            </a:r>
+          </a:p>
+          <a:p>
+            <a:pPr algn="l">
+              <a:lnSpc>
+                <a:spcPct val="112000"/>
+              </a:lnSpc>
+            </a:pPr>
+            <a:r>
+              <a:rPr sz="2000" b="1">
+                <a:solidFill>
+                  <a:srgbClr val="00FF41"/>
+                </a:solidFill>
+                <a:latin typeface="Arial"/>
+              </a:rPr>
+              <a:t>•  </a:t>
+            </a:r>
+            <a:r>
+              <a:rPr sz="2000" b="0">
+                <a:solidFill>
+                  <a:srgbClr val="F5F7FA"/>
+                </a:solidFill>
+                <a:latin typeface="Arial"/>
+              </a:rPr>
+              <a:t>The pitch - your video.</a:t>
+            </a:r>
+          </a:p>
+          <a:p>
+            <a:pPr algn="l">
+              <a:lnSpc>
+                <a:spcPct val="112000"/>
+              </a:lnSpc>
+            </a:pPr>
+            <a:r>
+              <a:rPr sz="2000" b="1">
+                <a:solidFill>
+                  <a:srgbClr val="00FF41"/>
+                </a:solidFill>
+                <a:latin typeface="Arial"/>
+              </a:rPr>
+              <a:t>•  </a:t>
+            </a:r>
+            <a:r>
+              <a:rPr sz="2000" b="0">
+                <a:solidFill>
+                  <a:srgbClr val="F5F7FA"/>
+                </a:solidFill>
+                <a:latin typeface="Arial"/>
+              </a:rPr>
+              <a:t>The afterlife - who keeps using or maintaining it.</a:t>
+            </a:r>
+          </a:p>
+        </p:txBody>
+      </p:sp>
+      <p:sp>
+        <p:nvSpPr>
+          <p:cNvPr id="6" name="TextBox 5"/>
+          <p:cNvSpPr txBox="1"/>
+          <p:nvPr/>
+        </p:nvSpPr>
+        <p:spPr>
+          <a:xfrm>
+            <a:off x="640080" y="6355080"/>
+            <a:ext cx="10972800" cy="365760"/>
+          </a:xfrm>
+          <a:prstGeom prst="rect">
+            <a:avLst/>
+          </a:prstGeom>
+          <a:noFill/>
+        </p:spPr>
+        <p:txBody>
+          <a:bodyPr wrap="square" anchor="t">
+            <a:spAutoFit/>
+          </a:bodyPr>
+          <a:lstStyle/>
+          <a:p>
+            <a:pPr algn="l">
+              <a:lnSpc>
+                <a:spcPct val="100000"/>
+              </a:lnSpc>
+            </a:pPr>
+            <a:r>
+              <a:rPr sz="1000" b="0">
+                <a:solidFill>
+                  <a:srgbClr val="5A6474"/>
+                </a:solidFill>
+                <a:latin typeface="Courier New"/>
+              </a:rPr>
+              <a:t>Good Code, Good Vibes · TECHIE 1121 · Cornell Tech · Summer 2026</a:t>
+            </a:r>
+          </a:p>
+        </p:txBody>
+      </p:sp>
+    </p:spTree>
+  </p:cSld>
+  <p:clrMapOvr>
+    <a:masterClrMapping/>
+  </p:clrMapOvr>
+</p:sld>
+</file>
+
+<file path=ppt/slides/slide7.xml><?xml version="1.0" encoding="utf-8"?>
+<p:sld xmlns:a="http://schemas.openxmlformats.org/drawingml/2006/main" xmlns:p="http://schemas.openxmlformats.org/presentationml/2006/main" xmlns:r="http://schemas.openxmlformats.org/officeDocument/2006/relationships">
+  <p:cSld>
+    <p:bg>
+      <p:bgPr>
+        <a:solidFill>
+          <a:srgbClr val="0B0E14"/>
+        </a:solidFill>
+        <a:effectLst/>
+      </p:bgPr>
+    </p:bg>
+    <p:spTree>
+      <p:nvGrpSpPr>
+        <p:cNvPr id="1" name=""/>
+        <p:cNvGrpSpPr/>
+        <p:nvPr/>
+      </p:nvGrpSpPr>
+      <p:grpSpPr/>
+      <p:sp>
+        <p:nvSpPr>
+          <p:cNvPr id="2" name="TextBox 1"/>
+          <p:cNvSpPr txBox="1"/>
+          <p:nvPr/>
+        </p:nvSpPr>
+        <p:spPr>
+          <a:xfrm>
+            <a:off x="640080" y="502920"/>
+            <a:ext cx="10058400" cy="365760"/>
+          </a:xfrm>
+          <a:prstGeom prst="rect">
+            <a:avLst/>
+          </a:prstGeom>
+          <a:noFill/>
+        </p:spPr>
+        <p:txBody>
+          <a:bodyPr wrap="square" anchor="t">
+            <a:spAutoFit/>
+          </a:bodyPr>
+          <a:lstStyle/>
+          <a:p>
+            <a:pPr algn="l">
+              <a:lnSpc>
+                <a:spcPct val="100000"/>
+              </a:lnSpc>
+            </a:pPr>
+            <a:r>
+              <a:rPr sz="1300" b="1">
+                <a:solidFill>
+                  <a:srgbClr val="00FF41"/>
+                </a:solidFill>
+                <a:latin typeface="Courier New"/>
+              </a:rPr>
+              <a:t>HOW IT'S GRADED</a:t>
+            </a:r>
+          </a:p>
+        </p:txBody>
+      </p:sp>
+      <p:sp>
+        <p:nvSpPr>
+          <p:cNvPr id="3" name="Rectangle 2"/>
+          <p:cNvSpPr/>
+          <p:nvPr/>
+        </p:nvSpPr>
+        <p:spPr>
+          <a:xfrm>
+            <a:off x="640080" y="932688"/>
+            <a:ext cx="822960" cy="73152"/>
+          </a:xfrm>
+          <a:prstGeom prst="rect">
+            <a:avLst/>
+          </a:prstGeom>
+          <a:solidFill>
+            <a:srgbClr val="00FF41"/>
+          </a:solidFill>
+          <a:ln>
+            <a:noFill/>
+          </a:ln>
+          <a:effectLst/>
+        </p:spPr>
+        <p:style>
+          <a:lnRef idx="1">
+            <a:schemeClr val="accent1"/>
+          </a:lnRef>
+          <a:fillRef idx="3">
+            <a:schemeClr val="accent1"/>
+          </a:fillRef>
+          <a:effectRef idx="2">
+            <a:schemeClr val="accent1"/>
+          </a:effectRef>
+          <a:fontRef idx="minor">
+            <a:schemeClr val="lt1"/>
+          </a:fontRef>
+        </p:style>
+        <p:txBody>
+          <a:bodyPr rtlCol="0" anchor="ctr"/>
+          <a:lstStyle/>
+          <a:p>
+            <a:pPr algn="ctr"/>
+          </a:p>
+        </p:txBody>
+      </p:sp>
+      <p:sp>
+        <p:nvSpPr>
+          <p:cNvPr id="4" name="TextBox 3"/>
+          <p:cNvSpPr txBox="1"/>
+          <p:nvPr/>
+        </p:nvSpPr>
+        <p:spPr>
+          <a:xfrm>
+            <a:off x="640080" y="1188720"/>
+            <a:ext cx="10972800" cy="914400"/>
+          </a:xfrm>
+          <a:prstGeom prst="rect">
+            <a:avLst/>
+          </a:prstGeom>
+          <a:noFill/>
+        </p:spPr>
+        <p:txBody>
+          <a:bodyPr wrap="square" anchor="t">
+            <a:spAutoFit/>
+          </a:bodyPr>
+          <a:lstStyle/>
+          <a:p>
+            <a:pPr algn="l">
+              <a:lnSpc>
+                <a:spcPct val="100000"/>
+              </a:lnSpc>
+            </a:pPr>
+            <a:r>
+              <a:rPr sz="3200" b="1">
+                <a:solidFill>
+                  <a:srgbClr val="F5F7FA"/>
+                </a:solidFill>
+                <a:latin typeface="Arial"/>
+              </a:rPr>
+              <a:t>Four checkpoints, one grade</a:t>
+            </a:r>
+          </a:p>
+        </p:txBody>
+      </p:sp>
+      <p:sp>
+        <p:nvSpPr>
+          <p:cNvPr id="5" name="Rounded Rectangle 4"/>
+          <p:cNvSpPr/>
+          <p:nvPr/>
+        </p:nvSpPr>
+        <p:spPr>
+          <a:xfrm>
+            <a:off x="640080" y="2468880"/>
+            <a:ext cx="3393338" cy="3383280"/>
+          </a:xfrm>
+          <a:prstGeom prst="roundRect">
+            <a:avLst/>
+          </a:prstGeom>
+          <a:solidFill>
+            <a:srgbClr val="151B26"/>
+          </a:solidFill>
+          <a:ln>
+            <a:noFill/>
+          </a:ln>
+          <a:effectLst/>
+        </p:spPr>
+        <p:style>
+          <a:lnRef idx="1">
+            <a:schemeClr val="accent1"/>
+          </a:lnRef>
+          <a:fillRef idx="3">
+            <a:schemeClr val="accent1"/>
+          </a:fillRef>
+          <a:effectRef idx="2">
+            <a:schemeClr val="accent1"/>
+          </a:effectRef>
+          <a:fontRef idx="minor">
+            <a:schemeClr val="lt1"/>
+          </a:fontRef>
+        </p:style>
+        <p:txBody>
+          <a:bodyPr rtlCol="0" anchor="ctr"/>
+          <a:lstStyle/>
+          <a:p>
+            <a:pPr algn="ctr"/>
+          </a:p>
+        </p:txBody>
+      </p:sp>
+      <p:sp>
+        <p:nvSpPr>
+          <p:cNvPr id="6" name="Rectangle 5"/>
+          <p:cNvSpPr/>
+          <p:nvPr/>
+        </p:nvSpPr>
+        <p:spPr>
+          <a:xfrm>
+            <a:off x="640080" y="2468880"/>
+            <a:ext cx="3393338" cy="82296"/>
+          </a:xfrm>
+          <a:prstGeom prst="rect">
+            <a:avLst/>
+          </a:prstGeom>
+          <a:solidFill>
+            <a:srgbClr val="00FF41"/>
+          </a:solidFill>
+          <a:ln>
+            <a:noFill/>
+          </a:ln>
+          <a:effectLst/>
+        </p:spPr>
+        <p:style>
+          <a:lnRef idx="1">
+            <a:schemeClr val="accent1"/>
+          </a:lnRef>
+          <a:fillRef idx="3">
+            <a:schemeClr val="accent1"/>
+          </a:fillRef>
+          <a:effectRef idx="2">
+            <a:schemeClr val="accent1"/>
+          </a:effectRef>
+          <a:fontRef idx="minor">
+            <a:schemeClr val="lt1"/>
+          </a:fontRef>
+        </p:style>
+        <p:txBody>
+          <a:bodyPr rtlCol="0" anchor="ctr"/>
+          <a:lstStyle/>
+          <a:p>
+            <a:pPr algn="ctr"/>
+          </a:p>
+        </p:txBody>
+      </p:sp>
+      <p:sp>
+        <p:nvSpPr>
+          <p:cNvPr id="7" name="TextBox 6"/>
+          <p:cNvSpPr txBox="1"/>
+          <p:nvPr/>
+        </p:nvSpPr>
+        <p:spPr>
+          <a:xfrm>
+            <a:off x="914400" y="2788920"/>
+            <a:ext cx="2844698" cy="457200"/>
+          </a:xfrm>
+          <a:prstGeom prst="rect">
+            <a:avLst/>
+          </a:prstGeom>
+          <a:noFill/>
+        </p:spPr>
+        <p:txBody>
+          <a:bodyPr wrap="square" anchor="t">
+            <a:spAutoFit/>
+          </a:bodyPr>
+          <a:lstStyle/>
+          <a:p>
+            <a:pPr algn="l">
+              <a:lnSpc>
+                <a:spcPct val="100000"/>
+              </a:lnSpc>
+            </a:pPr>
+            <a:r>
+              <a:rPr sz="1200" b="1">
+                <a:solidFill>
+                  <a:srgbClr val="00FF41"/>
+                </a:solidFill>
+                <a:latin typeface="Courier New"/>
+              </a:rPr>
+              <a:t>TUE - VERIFY</a:t>
+            </a:r>
+          </a:p>
+        </p:txBody>
+      </p:sp>
+      <p:sp>
+        <p:nvSpPr>
+          <p:cNvPr id="8" name="TextBox 7"/>
+          <p:cNvSpPr txBox="1"/>
+          <p:nvPr/>
+        </p:nvSpPr>
+        <p:spPr>
+          <a:xfrm>
+            <a:off x="914400" y="3246120"/>
+            <a:ext cx="2844698" cy="822960"/>
+          </a:xfrm>
+          <a:prstGeom prst="rect">
+            <a:avLst/>
+          </a:prstGeom>
+          <a:noFill/>
+        </p:spPr>
+        <p:txBody>
+          <a:bodyPr wrap="square" anchor="t">
+            <a:spAutoFit/>
+          </a:bodyPr>
+          <a:lstStyle/>
+          <a:p>
+            <a:pPr algn="l">
+              <a:lnSpc>
+                <a:spcPct val="100000"/>
+              </a:lnSpc>
+            </a:pPr>
+            <a:r>
+              <a:rPr sz="2000" b="1">
+                <a:solidFill>
+                  <a:srgbClr val="F5F7FA"/>
+                </a:solidFill>
+                <a:latin typeface="Arial"/>
+              </a:rPr>
+              <a:t>Checkpoint 1</a:t>
+            </a:r>
+          </a:p>
+        </p:txBody>
+      </p:sp>
+      <p:sp>
+        <p:nvSpPr>
+          <p:cNvPr id="9" name="TextBox 8"/>
+          <p:cNvSpPr txBox="1"/>
+          <p:nvPr/>
+        </p:nvSpPr>
+        <p:spPr>
+          <a:xfrm>
+            <a:off x="914400" y="4114800"/>
+            <a:ext cx="2844698" cy="1554480"/>
+          </a:xfrm>
+          <a:prstGeom prst="rect">
+            <a:avLst/>
+          </a:prstGeom>
+          <a:noFill/>
+        </p:spPr>
+        <p:txBody>
+          <a:bodyPr wrap="square" anchor="t">
+            <a:spAutoFit/>
+          </a:bodyPr>
+          <a:lstStyle/>
+          <a:p>
+            <a:pPr algn="l">
+              <a:lnSpc>
+                <a:spcPct val="110000"/>
+              </a:lnSpc>
+            </a:pPr>
+            <a:r>
+              <a:rPr sz="1500" b="0">
+                <a:solidFill>
+                  <a:srgbClr val="8A94A6"/>
+                </a:solidFill>
+                <a:latin typeface="Arial"/>
+              </a:rPr>
+              <a:t>Value verification: research deck + canvas.</a:t>
+            </a:r>
+          </a:p>
+        </p:txBody>
+      </p:sp>
+      <p:sp>
+        <p:nvSpPr>
+          <p:cNvPr id="10" name="Rounded Rectangle 9"/>
+          <p:cNvSpPr/>
+          <p:nvPr/>
+        </p:nvSpPr>
+        <p:spPr>
+          <a:xfrm>
+            <a:off x="4399178" y="2468880"/>
+            <a:ext cx="3393338" cy="3383280"/>
+          </a:xfrm>
+          <a:prstGeom prst="roundRect">
+            <a:avLst/>
+          </a:prstGeom>
+          <a:solidFill>
+            <a:srgbClr val="151B26"/>
+          </a:solidFill>
+          <a:ln>
+            <a:noFill/>
+          </a:ln>
+          <a:effectLst/>
+        </p:spPr>
+        <p:style>
+          <a:lnRef idx="1">
+            <a:schemeClr val="accent1"/>
+          </a:lnRef>
+          <a:fillRef idx="3">
+            <a:schemeClr val="accent1"/>
+          </a:fillRef>
+          <a:effectRef idx="2">
+            <a:schemeClr val="accent1"/>
+          </a:effectRef>
+          <a:fontRef idx="minor">
+            <a:schemeClr val="lt1"/>
+          </a:fontRef>
+        </p:style>
+        <p:txBody>
+          <a:bodyPr rtlCol="0" anchor="ctr"/>
+          <a:lstStyle/>
+          <a:p>
+            <a:pPr algn="ctr"/>
+          </a:p>
+        </p:txBody>
+      </p:sp>
+      <p:sp>
+        <p:nvSpPr>
+          <p:cNvPr id="11" name="Rectangle 10"/>
+          <p:cNvSpPr/>
+          <p:nvPr/>
+        </p:nvSpPr>
+        <p:spPr>
+          <a:xfrm>
+            <a:off x="4399178" y="2468880"/>
+            <a:ext cx="3393338" cy="82296"/>
+          </a:xfrm>
+          <a:prstGeom prst="rect">
+            <a:avLst/>
+          </a:prstGeom>
+          <a:solidFill>
+            <a:srgbClr val="00FF41"/>
+          </a:solidFill>
+          <a:ln>
+            <a:noFill/>
+          </a:ln>
+          <a:effectLst/>
+        </p:spPr>
+        <p:style>
+          <a:lnRef idx="1">
+            <a:schemeClr val="accent1"/>
+          </a:lnRef>
+          <a:fillRef idx="3">
+            <a:schemeClr val="accent1"/>
+          </a:fillRef>
+          <a:effectRef idx="2">
+            <a:schemeClr val="accent1"/>
+          </a:effectRef>
+          <a:fontRef idx="minor">
+            <a:schemeClr val="lt1"/>
+          </a:fontRef>
+        </p:style>
+        <p:txBody>
+          <a:bodyPr rtlCol="0" anchor="ctr"/>
+          <a:lstStyle/>
+          <a:p>
+            <a:pPr algn="ctr"/>
+          </a:p>
+        </p:txBody>
+      </p:sp>
+      <p:sp>
+        <p:nvSpPr>
+          <p:cNvPr id="12" name="TextBox 11"/>
+          <p:cNvSpPr txBox="1"/>
+          <p:nvPr/>
+        </p:nvSpPr>
+        <p:spPr>
+          <a:xfrm>
+            <a:off x="4673498" y="2788920"/>
+            <a:ext cx="2844698" cy="457200"/>
+          </a:xfrm>
+          <a:prstGeom prst="rect">
+            <a:avLst/>
+          </a:prstGeom>
+          <a:noFill/>
+        </p:spPr>
+        <p:txBody>
+          <a:bodyPr wrap="square" anchor="t">
+            <a:spAutoFit/>
+          </a:bodyPr>
+          <a:lstStyle/>
+          <a:p>
+            <a:pPr algn="l">
+              <a:lnSpc>
+                <a:spcPct val="100000"/>
+              </a:lnSpc>
+            </a:pPr>
+            <a:r>
+              <a:rPr sz="1200" b="1">
+                <a:solidFill>
+                  <a:srgbClr val="00FF41"/>
+                </a:solidFill>
+                <a:latin typeface="Courier New"/>
+              </a:rPr>
+              <a:t>WED - PLAN</a:t>
+            </a:r>
+          </a:p>
+        </p:txBody>
+      </p:sp>
+      <p:sp>
+        <p:nvSpPr>
+          <p:cNvPr id="13" name="TextBox 12"/>
+          <p:cNvSpPr txBox="1"/>
+          <p:nvPr/>
+        </p:nvSpPr>
+        <p:spPr>
+          <a:xfrm>
+            <a:off x="4673498" y="3246120"/>
+            <a:ext cx="2844698" cy="822960"/>
+          </a:xfrm>
+          <a:prstGeom prst="rect">
+            <a:avLst/>
+          </a:prstGeom>
+          <a:noFill/>
+        </p:spPr>
+        <p:txBody>
+          <a:bodyPr wrap="square" anchor="t">
+            <a:spAutoFit/>
+          </a:bodyPr>
+          <a:lstStyle/>
+          <a:p>
+            <a:pPr algn="l">
+              <a:lnSpc>
+                <a:spcPct val="100000"/>
+              </a:lnSpc>
+            </a:pPr>
+            <a:r>
+              <a:rPr sz="2000" b="1">
+                <a:solidFill>
+                  <a:srgbClr val="F5F7FA"/>
+                </a:solidFill>
+                <a:latin typeface="Arial"/>
+              </a:rPr>
+              <a:t>Checkpoint 2</a:t>
+            </a:r>
+          </a:p>
+        </p:txBody>
+      </p:sp>
+      <p:sp>
+        <p:nvSpPr>
+          <p:cNvPr id="14" name="TextBox 13"/>
+          <p:cNvSpPr txBox="1"/>
+          <p:nvPr/>
+        </p:nvSpPr>
+        <p:spPr>
+          <a:xfrm>
+            <a:off x="4673498" y="4114800"/>
+            <a:ext cx="2844698" cy="1554480"/>
+          </a:xfrm>
+          <a:prstGeom prst="rect">
+            <a:avLst/>
+          </a:prstGeom>
+          <a:noFill/>
+        </p:spPr>
+        <p:txBody>
+          <a:bodyPr wrap="square" anchor="t">
+            <a:spAutoFit/>
+          </a:bodyPr>
+          <a:lstStyle/>
+          <a:p>
+            <a:pPr algn="l">
+              <a:lnSpc>
+                <a:spcPct val="110000"/>
+              </a:lnSpc>
+            </a:pPr>
+            <a:r>
+              <a:rPr sz="1500" b="0">
+                <a:solidFill>
+                  <a:srgbClr val="8A94A6"/>
+                </a:solidFill>
+                <a:latin typeface="Arial"/>
+              </a:rPr>
+              <a:t>Value-centered planning: planning report + storyboard.</a:t>
+            </a:r>
+          </a:p>
+        </p:txBody>
+      </p:sp>
+      <p:sp>
+        <p:nvSpPr>
+          <p:cNvPr id="15" name="Rounded Rectangle 14"/>
+          <p:cNvSpPr/>
+          <p:nvPr/>
+        </p:nvSpPr>
+        <p:spPr>
+          <a:xfrm>
+            <a:off x="8158276" y="2468880"/>
+            <a:ext cx="3393338" cy="3383280"/>
+          </a:xfrm>
+          <a:prstGeom prst="roundRect">
+            <a:avLst/>
+          </a:prstGeom>
+          <a:solidFill>
+            <a:srgbClr val="151B26"/>
+          </a:solidFill>
+          <a:ln>
+            <a:noFill/>
+          </a:ln>
+          <a:effectLst/>
+        </p:spPr>
+        <p:style>
+          <a:lnRef idx="1">
+            <a:schemeClr val="accent1"/>
+          </a:lnRef>
+          <a:fillRef idx="3">
+            <a:schemeClr val="accent1"/>
+          </a:fillRef>
+          <a:effectRef idx="2">
+            <a:schemeClr val="accent1"/>
+          </a:effectRef>
+          <a:fontRef idx="minor">
+            <a:schemeClr val="lt1"/>
+          </a:fontRef>
+        </p:style>
+        <p:txBody>
+          <a:bodyPr rtlCol="0" anchor="ctr"/>
+          <a:lstStyle/>
+          <a:p>
+            <a:pPr algn="ctr"/>
+          </a:p>
+        </p:txBody>
+      </p:sp>
+      <p:sp>
+        <p:nvSpPr>
+          <p:cNvPr id="16" name="Rectangle 15"/>
+          <p:cNvSpPr/>
+          <p:nvPr/>
+        </p:nvSpPr>
+        <p:spPr>
+          <a:xfrm>
+            <a:off x="8158276" y="2468880"/>
+            <a:ext cx="3393338" cy="82296"/>
+          </a:xfrm>
+          <a:prstGeom prst="rect">
+            <a:avLst/>
+          </a:prstGeom>
+          <a:solidFill>
+            <a:srgbClr val="00FF41"/>
+          </a:solidFill>
+          <a:ln>
+            <a:noFill/>
+          </a:ln>
+          <a:effectLst/>
+        </p:spPr>
+        <p:style>
+          <a:lnRef idx="1">
+            <a:schemeClr val="accent1"/>
+          </a:lnRef>
+          <a:fillRef idx="3">
+            <a:schemeClr val="accent1"/>
+          </a:fillRef>
+          <a:effectRef idx="2">
+            <a:schemeClr val="accent1"/>
+          </a:effectRef>
+          <a:fontRef idx="minor">
+            <a:schemeClr val="lt1"/>
+          </a:fontRef>
+        </p:style>
+        <p:txBody>
+          <a:bodyPr rtlCol="0" anchor="ctr"/>
+          <a:lstStyle/>
+          <a:p>
+            <a:pPr algn="ctr"/>
+          </a:p>
+        </p:txBody>
+      </p:sp>
+      <p:sp>
+        <p:nvSpPr>
+          <p:cNvPr id="17" name="TextBox 16"/>
+          <p:cNvSpPr txBox="1"/>
+          <p:nvPr/>
+        </p:nvSpPr>
+        <p:spPr>
+          <a:xfrm>
+            <a:off x="8432596" y="2788920"/>
+            <a:ext cx="2844698" cy="457200"/>
+          </a:xfrm>
+          <a:prstGeom prst="rect">
+            <a:avLst/>
+          </a:prstGeom>
+          <a:noFill/>
+        </p:spPr>
+        <p:txBody>
+          <a:bodyPr wrap="square" anchor="t">
+            <a:spAutoFit/>
+          </a:bodyPr>
+          <a:lstStyle/>
+          <a:p>
+            <a:pPr algn="l">
+              <a:lnSpc>
+                <a:spcPct val="100000"/>
+              </a:lnSpc>
+            </a:pPr>
+            <a:r>
+              <a:rPr sz="1200" b="1">
+                <a:solidFill>
+                  <a:srgbClr val="00FF41"/>
+                </a:solidFill>
+                <a:latin typeface="Courier New"/>
+              </a:rPr>
+              <a:t>THU - BUILD</a:t>
+            </a:r>
+          </a:p>
+        </p:txBody>
+      </p:sp>
+      <p:sp>
+        <p:nvSpPr>
+          <p:cNvPr id="18" name="TextBox 17"/>
+          <p:cNvSpPr txBox="1"/>
+          <p:nvPr/>
+        </p:nvSpPr>
+        <p:spPr>
+          <a:xfrm>
+            <a:off x="8432596" y="3246120"/>
+            <a:ext cx="2844698" cy="822960"/>
+          </a:xfrm>
+          <a:prstGeom prst="rect">
+            <a:avLst/>
+          </a:prstGeom>
+          <a:noFill/>
+        </p:spPr>
+        <p:txBody>
+          <a:bodyPr wrap="square" anchor="t">
+            <a:spAutoFit/>
+          </a:bodyPr>
+          <a:lstStyle/>
+          <a:p>
+            <a:pPr algn="l">
+              <a:lnSpc>
+                <a:spcPct val="100000"/>
+              </a:lnSpc>
+            </a:pPr>
+            <a:r>
+              <a:rPr sz="2000" b="1">
+                <a:solidFill>
+                  <a:srgbClr val="F5F7FA"/>
+                </a:solidFill>
+                <a:latin typeface="Arial"/>
+              </a:rPr>
+              <a:t>Checkpoint 3</a:t>
+            </a:r>
+          </a:p>
+        </p:txBody>
+      </p:sp>
+      <p:sp>
+        <p:nvSpPr>
+          <p:cNvPr id="19" name="TextBox 18"/>
+          <p:cNvSpPr txBox="1"/>
+          <p:nvPr/>
+        </p:nvSpPr>
+        <p:spPr>
+          <a:xfrm>
+            <a:off x="8432596" y="4114800"/>
+            <a:ext cx="2844698" cy="1554480"/>
+          </a:xfrm>
+          <a:prstGeom prst="rect">
+            <a:avLst/>
+          </a:prstGeom>
+          <a:noFill/>
+        </p:spPr>
+        <p:txBody>
+          <a:bodyPr wrap="square" anchor="t">
+            <a:spAutoFit/>
+          </a:bodyPr>
+          <a:lstStyle/>
+          <a:p>
+            <a:pPr algn="l">
+              <a:lnSpc>
+                <a:spcPct val="110000"/>
+              </a:lnSpc>
+            </a:pPr>
+            <a:r>
+              <a:rPr sz="1500" b="0">
+                <a:solidFill>
+                  <a:srgbClr val="8A94A6"/>
+                </a:solidFill>
+                <a:latin typeface="Arial"/>
+              </a:rPr>
+              <a:t>Hosted app + project report + pitch.</a:t>
+            </a:r>
+          </a:p>
+        </p:txBody>
+      </p:sp>
+      <p:sp>
+        <p:nvSpPr>
+          <p:cNvPr id="20" name="TextBox 19"/>
+          <p:cNvSpPr txBox="1"/>
+          <p:nvPr/>
+        </p:nvSpPr>
+        <p:spPr>
+          <a:xfrm>
+            <a:off x="640080" y="6355080"/>
+            <a:ext cx="10972800" cy="365760"/>
+          </a:xfrm>
+          <a:prstGeom prst="rect">
+            <a:avLst/>
+          </a:prstGeom>
+          <a:noFill/>
+        </p:spPr>
+        <p:txBody>
+          <a:bodyPr wrap="square" anchor="t">
+            <a:spAutoFit/>
+          </a:bodyPr>
+          <a:lstStyle/>
+          <a:p>
+            <a:pPr algn="l">
+              <a:lnSpc>
+                <a:spcPct val="100000"/>
+              </a:lnSpc>
+            </a:pPr>
+            <a:r>
+              <a:rPr sz="1000" b="0">
+                <a:solidFill>
+                  <a:srgbClr val="5A6474"/>
+                </a:solidFill>
+                <a:latin typeface="Courier New"/>
+              </a:rPr>
+              <a:t>Good Code, Good Vibes · TECHIE 1121 · Cornell Tech · Summer 2026</a:t>
+            </a:r>
+          </a:p>
+        </p:txBody>
+      </p:sp>
+    </p:spTree>
+  </p:cSld>
+  <p:clrMapOvr>
+    <a:masterClrMapping/>
+  </p:clrMapOvr>
+</p:sld>
+</file>
+
+<file path=ppt/slides/slide8.xml><?xml version="1.0" encoding="utf-8"?>
+<p:sld xmlns:a="http://schemas.openxmlformats.org/drawingml/2006/main" xmlns:p="http://schemas.openxmlformats.org/presentationml/2006/main" xmlns:r="http://schemas.openxmlformats.org/officeDocument/2006/relationships">
+  <p:cSld>
+    <p:bg>
+      <p:bgPr>
+        <a:solidFill>
+          <a:srgbClr val="0B0E14"/>
+        </a:solidFill>
+        <a:effectLst/>
+      </p:bgPr>
+    </p:bg>
+    <p:spTree>
+      <p:nvGrpSpPr>
+        <p:cNvPr id="1" name=""/>
+        <p:cNvGrpSpPr/>
+        <p:nvPr/>
+      </p:nvGrpSpPr>
+      <p:grpSpPr/>
+      <p:sp>
+        <p:nvSpPr>
+          <p:cNvPr id="2" name="TextBox 1"/>
+          <p:cNvSpPr txBox="1"/>
+          <p:nvPr/>
+        </p:nvSpPr>
+        <p:spPr>
+          <a:xfrm>
+            <a:off x="640080" y="502920"/>
+            <a:ext cx="10058400" cy="365760"/>
+          </a:xfrm>
+          <a:prstGeom prst="rect">
+            <a:avLst/>
+          </a:prstGeom>
+          <a:noFill/>
+        </p:spPr>
+        <p:txBody>
+          <a:bodyPr wrap="square" anchor="t">
+            <a:spAutoFit/>
+          </a:bodyPr>
+          <a:lstStyle/>
+          <a:p>
+            <a:pPr algn="l">
+              <a:lnSpc>
+                <a:spcPct val="100000"/>
+              </a:lnSpc>
+            </a:pPr>
+            <a:r>
+              <a:rPr sz="1300" b="1">
+                <a:solidFill>
+                  <a:srgbClr val="00FF41"/>
+                </a:solidFill>
+                <a:latin typeface="Courier New"/>
+              </a:rPr>
+              <a:t>HOW IT'S GRADED</a:t>
+            </a:r>
+          </a:p>
+        </p:txBody>
+      </p:sp>
+      <p:sp>
+        <p:nvSpPr>
+          <p:cNvPr id="3" name="Rectangle 2"/>
+          <p:cNvSpPr/>
+          <p:nvPr/>
+        </p:nvSpPr>
+        <p:spPr>
+          <a:xfrm>
+            <a:off x="640080" y="932688"/>
+            <a:ext cx="822960" cy="73152"/>
+          </a:xfrm>
+          <a:prstGeom prst="rect">
+            <a:avLst/>
+          </a:prstGeom>
+          <a:solidFill>
+            <a:srgbClr val="00FF41"/>
+          </a:solidFill>
+          <a:ln>
+            <a:noFill/>
+          </a:ln>
+          <a:effectLst/>
+        </p:spPr>
+        <p:style>
+          <a:lnRef idx="1">
+            <a:schemeClr val="accent1"/>
+          </a:lnRef>
+          <a:fillRef idx="3">
+            <a:schemeClr val="accent1"/>
+          </a:fillRef>
+          <a:effectRef idx="2">
+            <a:schemeClr val="accent1"/>
+          </a:effectRef>
+          <a:fontRef idx="minor">
+            <a:schemeClr val="lt1"/>
+          </a:fontRef>
+        </p:style>
+        <p:txBody>
+          <a:bodyPr rtlCol="0" anchor="ctr"/>
+          <a:lstStyle/>
+          <a:p>
+            <a:pPr algn="ctr"/>
+          </a:p>
+        </p:txBody>
+      </p:sp>
+      <p:sp>
+        <p:nvSpPr>
+          <p:cNvPr id="4" name="TextBox 3"/>
+          <p:cNvSpPr txBox="1"/>
+          <p:nvPr/>
+        </p:nvSpPr>
+        <p:spPr>
+          <a:xfrm>
+            <a:off x="640080" y="1188720"/>
+            <a:ext cx="10972800" cy="914400"/>
+          </a:xfrm>
+          <a:prstGeom prst="rect">
+            <a:avLst/>
+          </a:prstGeom>
+          <a:noFill/>
+        </p:spPr>
+        <p:txBody>
+          <a:bodyPr wrap="square" anchor="t">
+            <a:spAutoFit/>
+          </a:bodyPr>
+          <a:lstStyle/>
+          <a:p>
+            <a:pPr algn="l">
+              <a:lnSpc>
+                <a:spcPct val="100000"/>
+              </a:lnSpc>
+            </a:pPr>
+            <a:r>
+              <a:rPr sz="3200" b="1">
+                <a:solidFill>
+                  <a:srgbClr val="F5F7FA"/>
+                </a:solidFill>
+                <a:latin typeface="Arial"/>
+              </a:rPr>
+              <a:t>...and the evening</a:t>
+            </a:r>
+          </a:p>
+        </p:txBody>
+      </p:sp>
+      <p:sp>
+        <p:nvSpPr>
+          <p:cNvPr id="5" name="Rounded Rectangle 4"/>
+          <p:cNvSpPr/>
+          <p:nvPr/>
+        </p:nvSpPr>
+        <p:spPr>
+          <a:xfrm>
+            <a:off x="640080" y="2468880"/>
+            <a:ext cx="3393338" cy="3383280"/>
+          </a:xfrm>
+          <a:prstGeom prst="roundRect">
+            <a:avLst/>
+          </a:prstGeom>
+          <a:solidFill>
+            <a:srgbClr val="151B26"/>
+          </a:solidFill>
+          <a:ln>
+            <a:noFill/>
+          </a:ln>
+          <a:effectLst/>
+        </p:spPr>
+        <p:style>
+          <a:lnRef idx="1">
+            <a:schemeClr val="accent1"/>
+          </a:lnRef>
+          <a:fillRef idx="3">
+            <a:schemeClr val="accent1"/>
+          </a:fillRef>
+          <a:effectRef idx="2">
+            <a:schemeClr val="accent1"/>
+          </a:effectRef>
+          <a:fontRef idx="minor">
+            <a:schemeClr val="lt1"/>
+          </a:fontRef>
+        </p:style>
+        <p:txBody>
+          <a:bodyPr rtlCol="0" anchor="ctr"/>
+          <a:lstStyle/>
+          <a:p>
+            <a:pPr algn="ctr"/>
+          </a:p>
+        </p:txBody>
+      </p:sp>
+      <p:sp>
+        <p:nvSpPr>
+          <p:cNvPr id="6" name="Rectangle 5"/>
+          <p:cNvSpPr/>
+          <p:nvPr/>
+        </p:nvSpPr>
+        <p:spPr>
+          <a:xfrm>
+            <a:off x="640080" y="2468880"/>
+            <a:ext cx="3393338" cy="82296"/>
+          </a:xfrm>
+          <a:prstGeom prst="rect">
+            <a:avLst/>
+          </a:prstGeom>
+          <a:solidFill>
+            <a:srgbClr val="00FF41"/>
+          </a:solidFill>
+          <a:ln>
+            <a:noFill/>
+          </a:ln>
+          <a:effectLst/>
+        </p:spPr>
+        <p:style>
+          <a:lnRef idx="1">
+            <a:schemeClr val="accent1"/>
+          </a:lnRef>
+          <a:fillRef idx="3">
+            <a:schemeClr val="accent1"/>
+          </a:fillRef>
+          <a:effectRef idx="2">
+            <a:schemeClr val="accent1"/>
+          </a:effectRef>
+          <a:fontRef idx="minor">
+            <a:schemeClr val="lt1"/>
+          </a:fontRef>
+        </p:style>
+        <p:txBody>
+          <a:bodyPr rtlCol="0" anchor="ctr"/>
+          <a:lstStyle/>
+          <a:p>
+            <a:pPr algn="ctr"/>
+          </a:p>
+        </p:txBody>
+      </p:sp>
+      <p:sp>
+        <p:nvSpPr>
+          <p:cNvPr id="7" name="TextBox 6"/>
+          <p:cNvSpPr txBox="1"/>
+          <p:nvPr/>
+        </p:nvSpPr>
+        <p:spPr>
+          <a:xfrm>
+            <a:off x="914400" y="2788920"/>
+            <a:ext cx="2844698" cy="457200"/>
+          </a:xfrm>
+          <a:prstGeom prst="rect">
+            <a:avLst/>
+          </a:prstGeom>
+          <a:noFill/>
+        </p:spPr>
+        <p:txBody>
+          <a:bodyPr wrap="square" anchor="t">
+            <a:spAutoFit/>
+          </a:bodyPr>
+          <a:lstStyle/>
+          <a:p>
+            <a:pPr algn="l">
+              <a:lnSpc>
+                <a:spcPct val="100000"/>
+              </a:lnSpc>
+            </a:pPr>
+            <a:r>
+              <a:rPr sz="1200" b="1">
+                <a:solidFill>
+                  <a:srgbClr val="00FF41"/>
+                </a:solidFill>
+                <a:latin typeface="Courier New"/>
+              </a:rPr>
+              <a:t>THU EVE - PRESENT</a:t>
+            </a:r>
+          </a:p>
+        </p:txBody>
+      </p:sp>
+      <p:sp>
+        <p:nvSpPr>
+          <p:cNvPr id="8" name="TextBox 7"/>
+          <p:cNvSpPr txBox="1"/>
+          <p:nvPr/>
+        </p:nvSpPr>
+        <p:spPr>
+          <a:xfrm>
+            <a:off x="914400" y="3246120"/>
+            <a:ext cx="2844698" cy="822960"/>
+          </a:xfrm>
+          <a:prstGeom prst="rect">
+            <a:avLst/>
+          </a:prstGeom>
+          <a:noFill/>
+        </p:spPr>
+        <p:txBody>
+          <a:bodyPr wrap="square" anchor="t">
+            <a:spAutoFit/>
+          </a:bodyPr>
+          <a:lstStyle/>
+          <a:p>
+            <a:pPr algn="l">
+              <a:lnSpc>
+                <a:spcPct val="100000"/>
+              </a:lnSpc>
+            </a:pPr>
+            <a:r>
+              <a:rPr sz="2000" b="1">
+                <a:solidFill>
+                  <a:srgbClr val="F5F7FA"/>
+                </a:solidFill>
+                <a:latin typeface="Arial"/>
+              </a:rPr>
+              <a:t>Checkpoint 4</a:t>
+            </a:r>
+          </a:p>
+        </p:txBody>
+      </p:sp>
+      <p:sp>
+        <p:nvSpPr>
+          <p:cNvPr id="9" name="TextBox 8"/>
+          <p:cNvSpPr txBox="1"/>
+          <p:nvPr/>
+        </p:nvSpPr>
+        <p:spPr>
+          <a:xfrm>
+            <a:off x="914400" y="4114800"/>
+            <a:ext cx="2844698" cy="1554480"/>
+          </a:xfrm>
+          <a:prstGeom prst="rect">
+            <a:avLst/>
+          </a:prstGeom>
+          <a:noFill/>
+        </p:spPr>
+        <p:txBody>
+          <a:bodyPr wrap="square" anchor="t">
+            <a:spAutoFit/>
+          </a:bodyPr>
+          <a:lstStyle/>
+          <a:p>
+            <a:pPr algn="l">
+              <a:lnSpc>
+                <a:spcPct val="110000"/>
+              </a:lnSpc>
+            </a:pPr>
+            <a:r>
+              <a:rPr sz="1500" b="0">
+                <a:solidFill>
+                  <a:srgbClr val="8A94A6"/>
+                </a:solidFill>
+                <a:latin typeface="Arial"/>
+              </a:rPr>
+              <a:t>The live demo on the monitors.</a:t>
+            </a:r>
+          </a:p>
+        </p:txBody>
+      </p:sp>
+      <p:sp>
+        <p:nvSpPr>
+          <p:cNvPr id="10" name="Rounded Rectangle 9"/>
+          <p:cNvSpPr/>
+          <p:nvPr/>
+        </p:nvSpPr>
+        <p:spPr>
+          <a:xfrm>
+            <a:off x="4399178" y="2468880"/>
+            <a:ext cx="3393338" cy="3383280"/>
+          </a:xfrm>
+          <a:prstGeom prst="roundRect">
+            <a:avLst/>
+          </a:prstGeom>
+          <a:solidFill>
+            <a:srgbClr val="151B26"/>
+          </a:solidFill>
+          <a:ln>
+            <a:noFill/>
+          </a:ln>
+          <a:effectLst/>
+        </p:spPr>
+        <p:style>
+          <a:lnRef idx="1">
+            <a:schemeClr val="accent1"/>
+          </a:lnRef>
+          <a:fillRef idx="3">
+            <a:schemeClr val="accent1"/>
+          </a:fillRef>
+          <a:effectRef idx="2">
+            <a:schemeClr val="accent1"/>
+          </a:effectRef>
+          <a:fontRef idx="minor">
+            <a:schemeClr val="lt1"/>
+          </a:fontRef>
+        </p:style>
+        <p:txBody>
+          <a:bodyPr rtlCol="0" anchor="ctr"/>
+          <a:lstStyle/>
+          <a:p>
+            <a:pPr algn="ctr"/>
+          </a:p>
+        </p:txBody>
+      </p:sp>
+      <p:sp>
+        <p:nvSpPr>
+          <p:cNvPr id="11" name="Rectangle 10"/>
+          <p:cNvSpPr/>
+          <p:nvPr/>
+        </p:nvSpPr>
+        <p:spPr>
+          <a:xfrm>
+            <a:off x="4399178" y="2468880"/>
+            <a:ext cx="3393338" cy="82296"/>
+          </a:xfrm>
+          <a:prstGeom prst="rect">
+            <a:avLst/>
+          </a:prstGeom>
+          <a:solidFill>
+            <a:srgbClr val="00FF41"/>
+          </a:solidFill>
+          <a:ln>
+            <a:noFill/>
+          </a:ln>
+          <a:effectLst/>
+        </p:spPr>
+        <p:style>
+          <a:lnRef idx="1">
+            <a:schemeClr val="accent1"/>
+          </a:lnRef>
+          <a:fillRef idx="3">
+            <a:schemeClr val="accent1"/>
+          </a:fillRef>
+          <a:effectRef idx="2">
+            <a:schemeClr val="accent1"/>
+          </a:effectRef>
+          <a:fontRef idx="minor">
+            <a:schemeClr val="lt1"/>
+          </a:fontRef>
+        </p:style>
+        <p:txBody>
+          <a:bodyPr rtlCol="0" anchor="ctr"/>
+          <a:lstStyle/>
+          <a:p>
+            <a:pPr algn="ctr"/>
+          </a:p>
+        </p:txBody>
+      </p:sp>
+      <p:sp>
+        <p:nvSpPr>
+          <p:cNvPr id="12" name="TextBox 11"/>
+          <p:cNvSpPr txBox="1"/>
+          <p:nvPr/>
+        </p:nvSpPr>
+        <p:spPr>
+          <a:xfrm>
+            <a:off x="4673498" y="2788920"/>
+            <a:ext cx="2844698" cy="457200"/>
+          </a:xfrm>
+          <a:prstGeom prst="rect">
+            <a:avLst/>
+          </a:prstGeom>
+          <a:noFill/>
+        </p:spPr>
+        <p:txBody>
+          <a:bodyPr wrap="square" anchor="t">
+            <a:spAutoFit/>
+          </a:bodyPr>
+          <a:lstStyle/>
+          <a:p>
+            <a:pPr algn="l">
+              <a:lnSpc>
+                <a:spcPct val="100000"/>
+              </a:lnSpc>
+            </a:pPr>
+            <a:r>
+              <a:rPr sz="1200" b="1">
+                <a:solidFill>
+                  <a:srgbClr val="00FF41"/>
+                </a:solidFill>
+                <a:latin typeface="Courier New"/>
+              </a:rPr>
+              <a:t>PROJECT</a:t>
+            </a:r>
+          </a:p>
+        </p:txBody>
+      </p:sp>
+      <p:sp>
+        <p:nvSpPr>
+          <p:cNvPr id="13" name="TextBox 12"/>
+          <p:cNvSpPr txBox="1"/>
+          <p:nvPr/>
+        </p:nvSpPr>
+        <p:spPr>
+          <a:xfrm>
+            <a:off x="4673498" y="3246120"/>
+            <a:ext cx="2844698" cy="822960"/>
+          </a:xfrm>
+          <a:prstGeom prst="rect">
+            <a:avLst/>
+          </a:prstGeom>
+          <a:noFill/>
+        </p:spPr>
+        <p:txBody>
+          <a:bodyPr wrap="square" anchor="t">
+            <a:spAutoFit/>
+          </a:bodyPr>
+          <a:lstStyle/>
+          <a:p>
+            <a:pPr algn="l">
+              <a:lnSpc>
+                <a:spcPct val="100000"/>
+              </a:lnSpc>
+            </a:pPr>
+            <a:r>
+              <a:rPr sz="2000" b="1">
+                <a:solidFill>
+                  <a:srgbClr val="F5F7FA"/>
+                </a:solidFill>
+                <a:latin typeface="Arial"/>
+              </a:rPr>
+              <a:t>25%</a:t>
+            </a:r>
+          </a:p>
+        </p:txBody>
+      </p:sp>
+      <p:sp>
+        <p:nvSpPr>
+          <p:cNvPr id="14" name="TextBox 13"/>
+          <p:cNvSpPr txBox="1"/>
+          <p:nvPr/>
+        </p:nvSpPr>
+        <p:spPr>
+          <a:xfrm>
+            <a:off x="4673498" y="4114800"/>
+            <a:ext cx="2844698" cy="1554480"/>
+          </a:xfrm>
+          <a:prstGeom prst="rect">
+            <a:avLst/>
+          </a:prstGeom>
+          <a:noFill/>
+        </p:spPr>
+        <p:txBody>
+          <a:bodyPr wrap="square" anchor="t">
+            <a:spAutoFit/>
+          </a:bodyPr>
+          <a:lstStyle/>
+          <a:p>
+            <a:pPr algn="l">
+              <a:lnSpc>
+                <a:spcPct val="110000"/>
+              </a:lnSpc>
+            </a:pPr>
+            <a:r>
+              <a:rPr sz="1500" b="0">
+                <a:solidFill>
+                  <a:srgbClr val="8A94A6"/>
+                </a:solidFill>
+                <a:latin typeface="Arial"/>
+              </a:rPr>
+              <a:t>Summary of the four Canvas checkpoints, against the project rubric.</a:t>
+            </a:r>
+          </a:p>
+        </p:txBody>
+      </p:sp>
+      <p:sp>
+        <p:nvSpPr>
+          <p:cNvPr id="15" name="Rounded Rectangle 14"/>
+          <p:cNvSpPr/>
+          <p:nvPr/>
+        </p:nvSpPr>
+        <p:spPr>
+          <a:xfrm>
+            <a:off x="8158276" y="2468880"/>
+            <a:ext cx="3393338" cy="3383280"/>
+          </a:xfrm>
+          <a:prstGeom prst="roundRect">
+            <a:avLst/>
+          </a:prstGeom>
+          <a:solidFill>
+            <a:srgbClr val="151B26"/>
+          </a:solidFill>
+          <a:ln>
+            <a:noFill/>
+          </a:ln>
+          <a:effectLst/>
+        </p:spPr>
+        <p:style>
+          <a:lnRef idx="1">
+            <a:schemeClr val="accent1"/>
+          </a:lnRef>
+          <a:fillRef idx="3">
+            <a:schemeClr val="accent1"/>
+          </a:fillRef>
+          <a:effectRef idx="2">
+            <a:schemeClr val="accent1"/>
+          </a:effectRef>
+          <a:fontRef idx="minor">
+            <a:schemeClr val="lt1"/>
+          </a:fontRef>
+        </p:style>
+        <p:txBody>
+          <a:bodyPr rtlCol="0" anchor="ctr"/>
+          <a:lstStyle/>
+          <a:p>
+            <a:pPr algn="ctr"/>
+          </a:p>
+        </p:txBody>
+      </p:sp>
+      <p:sp>
+        <p:nvSpPr>
+          <p:cNvPr id="16" name="Rectangle 15"/>
+          <p:cNvSpPr/>
+          <p:nvPr/>
+        </p:nvSpPr>
+        <p:spPr>
+          <a:xfrm>
+            <a:off x="8158276" y="2468880"/>
+            <a:ext cx="3393338" cy="82296"/>
+          </a:xfrm>
+          <a:prstGeom prst="rect">
+            <a:avLst/>
+          </a:prstGeom>
+          <a:solidFill>
+            <a:srgbClr val="00FF41"/>
+          </a:solidFill>
+          <a:ln>
+            <a:noFill/>
+          </a:ln>
+          <a:effectLst/>
+        </p:spPr>
+        <p:style>
+          <a:lnRef idx="1">
+            <a:schemeClr val="accent1"/>
+          </a:lnRef>
+          <a:fillRef idx="3">
+            <a:schemeClr val="accent1"/>
+          </a:fillRef>
+          <a:effectRef idx="2">
+            <a:schemeClr val="accent1"/>
+          </a:effectRef>
+          <a:fontRef idx="minor">
+            <a:schemeClr val="lt1"/>
+          </a:fontRef>
+        </p:style>
+        <p:txBody>
+          <a:bodyPr rtlCol="0" anchor="ctr"/>
+          <a:lstStyle/>
+          <a:p>
+            <a:pPr algn="ctr"/>
+          </a:p>
+        </p:txBody>
+      </p:sp>
+      <p:sp>
+        <p:nvSpPr>
+          <p:cNvPr id="17" name="TextBox 16"/>
+          <p:cNvSpPr txBox="1"/>
+          <p:nvPr/>
+        </p:nvSpPr>
+        <p:spPr>
+          <a:xfrm>
+            <a:off x="8432596" y="2788920"/>
+            <a:ext cx="2844698" cy="457200"/>
+          </a:xfrm>
+          <a:prstGeom prst="rect">
+            <a:avLst/>
+          </a:prstGeom>
+          <a:noFill/>
+        </p:spPr>
+        <p:txBody>
+          <a:bodyPr wrap="square" anchor="t">
+            <a:spAutoFit/>
+          </a:bodyPr>
+          <a:lstStyle/>
+          <a:p>
+            <a:pPr algn="l">
+              <a:lnSpc>
+                <a:spcPct val="100000"/>
+              </a:lnSpc>
+            </a:pPr>
+            <a:r>
+              <a:rPr sz="1200" b="1">
+                <a:solidFill>
+                  <a:srgbClr val="00FF41"/>
+                </a:solidFill>
+                <a:latin typeface="Courier New"/>
+              </a:rPr>
+              <a:t>PRESENTATION</a:t>
+            </a:r>
+          </a:p>
+        </p:txBody>
+      </p:sp>
+      <p:sp>
+        <p:nvSpPr>
+          <p:cNvPr id="18" name="TextBox 17"/>
+          <p:cNvSpPr txBox="1"/>
+          <p:nvPr/>
+        </p:nvSpPr>
+        <p:spPr>
+          <a:xfrm>
+            <a:off x="8432596" y="3246120"/>
+            <a:ext cx="2844698" cy="822960"/>
+          </a:xfrm>
+          <a:prstGeom prst="rect">
+            <a:avLst/>
+          </a:prstGeom>
+          <a:noFill/>
+        </p:spPr>
+        <p:txBody>
+          <a:bodyPr wrap="square" anchor="t">
+            <a:spAutoFit/>
+          </a:bodyPr>
+          <a:lstStyle/>
+          <a:p>
+            <a:pPr algn="l">
+              <a:lnSpc>
+                <a:spcPct val="100000"/>
+              </a:lnSpc>
+            </a:pPr>
+            <a:r>
+              <a:rPr sz="2000" b="1">
+                <a:solidFill>
+                  <a:srgbClr val="F5F7FA"/>
+                </a:solidFill>
+                <a:latin typeface="Arial"/>
+              </a:rPr>
+              <a:t>15%</a:t>
+            </a:r>
+          </a:p>
+        </p:txBody>
+      </p:sp>
+      <p:sp>
+        <p:nvSpPr>
+          <p:cNvPr id="19" name="TextBox 18"/>
+          <p:cNvSpPr txBox="1"/>
+          <p:nvPr/>
+        </p:nvSpPr>
+        <p:spPr>
+          <a:xfrm>
+            <a:off x="8432596" y="4114800"/>
+            <a:ext cx="2844698" cy="1554480"/>
+          </a:xfrm>
+          <a:prstGeom prst="rect">
+            <a:avLst/>
+          </a:prstGeom>
+          <a:noFill/>
+        </p:spPr>
+        <p:txBody>
+          <a:bodyPr wrap="square" anchor="t">
+            <a:spAutoFit/>
+          </a:bodyPr>
+          <a:lstStyle/>
+          <a:p>
+            <a:pPr algn="l">
+              <a:lnSpc>
+                <a:spcPct val="110000"/>
+              </a:lnSpc>
+            </a:pPr>
+            <a:r>
+              <a:rPr sz="1500" b="0">
+                <a:solidFill>
+                  <a:srgbClr val="8A94A6"/>
+                </a:solidFill>
+                <a:latin typeface="Arial"/>
+              </a:rPr>
+              <a:t>A separate grade for the demo. Peer-check adjusts for unfair contribution.</a:t>
+            </a:r>
+          </a:p>
+        </p:txBody>
+      </p:sp>
+      <p:sp>
+        <p:nvSpPr>
+          <p:cNvPr id="20" name="TextBox 19"/>
+          <p:cNvSpPr txBox="1"/>
+          <p:nvPr/>
+        </p:nvSpPr>
+        <p:spPr>
+          <a:xfrm>
+            <a:off x="640080" y="6355080"/>
+            <a:ext cx="10972800" cy="365760"/>
+          </a:xfrm>
+          <a:prstGeom prst="rect">
+            <a:avLst/>
+          </a:prstGeom>
+          <a:noFill/>
+        </p:spPr>
+        <p:txBody>
+          <a:bodyPr wrap="square" anchor="t">
+            <a:spAutoFit/>
+          </a:bodyPr>
+          <a:lstStyle/>
+          <a:p>
+            <a:pPr algn="l">
+              <a:lnSpc>
+                <a:spcPct val="100000"/>
+              </a:lnSpc>
+            </a:pPr>
+            <a:r>
+              <a:rPr sz="1000" b="0">
+                <a:solidFill>
+                  <a:srgbClr val="5A6474"/>
+                </a:solidFill>
+                <a:latin typeface="Courier New"/>
+              </a:rPr>
+              <a:t>Good Code, Good Vibes · TECHIE 1121 · Cornell Tech · Summer 2026</a:t>
+            </a:r>
+          </a:p>
+        </p:txBody>
+      </p:sp>
+    </p:spTree>
+  </p:cSld>
+  <p:clrMapOvr>
+    <a:masterClrMapping/>
+  </p:clrMapOvr>
+</p:sld>
+</file>
+
+<file path=ppt/slides/slide9.xml><?xml version="1.0" encoding="utf-8"?>
+<p:sld xmlns:a="http://schemas.openxmlformats.org/drawingml/2006/main" xmlns:p="http://schemas.openxmlformats.org/presentationml/2006/main" xmlns:r="http://schemas.openxmlformats.org/officeDocument/2006/relationships">
+  <p:cSld>
+    <p:bg>
+      <p:bgPr>
+        <a:solidFill>
+          <a:srgbClr val="0B0E14"/>
+        </a:solidFill>
+        <a:effectLst/>
+      </p:bgPr>
+    </p:bg>
+    <p:spTree>
+      <p:nvGrpSpPr>
+        <p:cNvPr id="1" name=""/>
+        <p:cNvGrpSpPr/>
+        <p:nvPr/>
+      </p:nvGrpSpPr>
+      <p:grpSpPr/>
+      <p:sp>
+        <p:nvSpPr>
+          <p:cNvPr id="2" name="TextBox 1"/>
+          <p:cNvSpPr txBox="1"/>
+          <p:nvPr/>
+        </p:nvSpPr>
+        <p:spPr>
+          <a:xfrm>
+            <a:off x="640080" y="502920"/>
+            <a:ext cx="10058400" cy="365760"/>
+          </a:xfrm>
+          <a:prstGeom prst="rect">
+            <a:avLst/>
+          </a:prstGeom>
+          <a:noFill/>
+        </p:spPr>
+        <p:txBody>
+          <a:bodyPr wrap="square" anchor="t">
+            <a:spAutoFit/>
+          </a:bodyPr>
+          <a:lstStyle/>
+          <a:p>
+            <a:pPr algn="l">
+              <a:lnSpc>
+                <a:spcPct val="100000"/>
+              </a:lnSpc>
+            </a:pPr>
+            <a:r>
+              <a:rPr sz="1300" b="1">
+                <a:solidFill>
+                  <a:srgbClr val="00FF41"/>
+                </a:solidFill>
+                <a:latin typeface="Courier New"/>
+              </a:rPr>
+              <a:t>LOGISTICS</a:t>
+            </a:r>
+          </a:p>
+        </p:txBody>
+      </p:sp>
+      <p:sp>
+        <p:nvSpPr>
+          <p:cNvPr id="3" name="Rectangle 2"/>
+          <p:cNvSpPr/>
+          <p:nvPr/>
+        </p:nvSpPr>
+        <p:spPr>
+          <a:xfrm>
+            <a:off x="640080" y="932688"/>
+            <a:ext cx="822960" cy="73152"/>
+          </a:xfrm>
+          <a:prstGeom prst="rect">
+            <a:avLst/>
+          </a:prstGeom>
+          <a:solidFill>
+            <a:srgbClr val="00FF41"/>
+          </a:solidFill>
+          <a:ln>
+            <a:noFill/>
+          </a:ln>
+          <a:effectLst/>
+        </p:spPr>
+        <p:style>
+          <a:lnRef idx="1">
+            <a:schemeClr val="accent1"/>
+          </a:lnRef>
+          <a:fillRef idx="3">
+            <a:schemeClr val="accent1"/>
+          </a:fillRef>
+          <a:effectRef idx="2">
+            <a:schemeClr val="accent1"/>
+          </a:effectRef>
+          <a:fontRef idx="minor">
+            <a:schemeClr val="lt1"/>
+          </a:fontRef>
+        </p:style>
+        <p:txBody>
+          <a:bodyPr rtlCol="0" anchor="ctr"/>
+          <a:lstStyle/>
+          <a:p>
+            <a:pPr algn="ctr"/>
+          </a:p>
+        </p:txBody>
+      </p:sp>
+      <p:sp>
+        <p:nvSpPr>
+          <p:cNvPr id="4" name="TextBox 3"/>
+          <p:cNvSpPr txBox="1"/>
+          <p:nvPr/>
+        </p:nvSpPr>
+        <p:spPr>
+          <a:xfrm>
+            <a:off x="640080" y="1188720"/>
+            <a:ext cx="10972800" cy="1097280"/>
+          </a:xfrm>
+          <a:prstGeom prst="rect">
+            <a:avLst/>
+          </a:prstGeom>
+          <a:noFill/>
+        </p:spPr>
+        <p:txBody>
+          <a:bodyPr wrap="square" anchor="t">
+            <a:spAutoFit/>
+          </a:bodyPr>
+          <a:lstStyle/>
+          <a:p>
+            <a:pPr algn="l">
+              <a:lnSpc>
+                <a:spcPct val="100000"/>
+              </a:lnSpc>
+            </a:pPr>
+            <a:r>
+              <a:rPr sz="3400" b="1">
+                <a:solidFill>
+                  <a:srgbClr val="F5F7FA"/>
+                </a:solidFill>
+                <a:latin typeface="Arial"/>
+              </a:rPr>
+              <a:t>Demo night</a:t>
+            </a:r>
+          </a:p>
+        </p:txBody>
+      </p:sp>
+      <p:sp>
+        <p:nvSpPr>
+          <p:cNvPr id="5" name="TextBox 4"/>
+          <p:cNvSpPr txBox="1"/>
+          <p:nvPr/>
+        </p:nvSpPr>
+        <p:spPr>
+          <a:xfrm>
+            <a:off x="658368" y="2286000"/>
+            <a:ext cx="10881360" cy="3657600"/>
+          </a:xfrm>
+          <a:prstGeom prst="rect">
+            <a:avLst/>
+          </a:prstGeom>
+          <a:noFill/>
+        </p:spPr>
+        <p:txBody>
+          <a:bodyPr wrap="square" anchor="t">
+            <a:spAutoFit/>
+          </a:bodyPr>
+          <a:lstStyle/>
+          <a:p>
+            <a:pPr algn="l">
+              <a:lnSpc>
+                <a:spcPct val="112000"/>
+              </a:lnSpc>
+            </a:pPr>
+            <a:r>
+              <a:rPr sz="2100" b="0">
+                <a:solidFill>
+                  <a:srgbClr val="F5F7FA"/>
+                </a:solidFill>
+                <a:latin typeface="Arial"/>
+              </a:rPr>
+              <a:t>Present on the monitors - prototype + slides. Demo from the HOSTED link, not localhost.</a:t>
+            </a:r>
+          </a:p>
+          <a:p>
+            <a:pPr algn="l">
+              <a:lnSpc>
+                <a:spcPct val="112000"/>
+              </a:lnSpc>
+            </a:pPr>
+            <a:r>
+              <a:rPr sz="2000" b="0">
+                <a:solidFill>
+                  <a:srgbClr val="F5F7FA"/>
+                </a:solidFill>
+                <a:latin typeface="Arial"/>
+              </a:rPr>
+              <a:t/>
+            </a:r>
+          </a:p>
+          <a:p>
+            <a:pPr algn="l">
+              <a:lnSpc>
+                <a:spcPct val="112000"/>
+              </a:lnSpc>
+            </a:pPr>
+            <a:r>
+              <a:rPr sz="1800" b="0">
+                <a:solidFill>
+                  <a:srgbClr val="8A94A6"/>
+                </a:solidFill>
+                <a:latin typeface="Arial"/>
+              </a:rPr>
+              <a:t>Keep a screen-recording backup in presentation/ in case the Wi-Fi drops.</a:t>
             </a:r>
           </a:p>
         </p:txBody>

--- a/slides/Week3-Thu-Final-Presentations.pptx
+++ b/slides/Week3-Thu-Final-Presentations.pptx
@@ -3642,7 +3642,7 @@
                 </a:solidFill>
                 <a:latin typeface="Arial"/>
               </a:rPr>
-              <a:t>Demo Night: What's the solution?</a:t>
+              <a:t>Build day: What's the solution?</a:t>
             </a:r>
           </a:p>
         </p:txBody>
@@ -3681,7 +3681,7 @@
                 </a:solidFill>
                 <a:latin typeface="Arial"/>
               </a:rPr>
-              <a:t>Build by day - present in the evening</a:t>
+              <a:t>No lecture - build all morning, showcase at 3-5</a:t>
             </a:r>
           </a:p>
         </p:txBody>
@@ -4087,7 +4087,7 @@
                 </a:solidFill>
                 <a:latin typeface="Arial"/>
               </a:rPr>
-              <a:t>Build in daylight. Show it tonight.</a:t>
+              <a:t>No lecture. Heads-down build, then showcase.</a:t>
             </a:r>
           </a:p>
         </p:txBody>
@@ -4126,7 +4126,7 @@
                 </a:solidFill>
                 <a:latin typeface="Arial"/>
               </a:rPr>
-              <a:t>First half: build the smallest real thing from your storyboard. Evening: present it live on the monitors.</a:t>
+              <a:t>You already tested Monday (usability) and researched the value Tuesday - today is NOT a new test day. Build the smallest real thing, and tell its story well.</a:t>
             </a:r>
           </a:p>
           <a:p>
@@ -4158,7 +4158,7 @@
                 </a:solidFill>
                 <a:latin typeface="Arial"/>
               </a:rPr>
-              <a:t>Everything you planned Wednesday becomes an artifact people can use.</a:t>
+              <a:t>Everything you planned Wednesday becomes an artifact people can use. Showcase runs 3-5.</a:t>
             </a:r>
           </a:p>
         </p:txBody>
@@ -4468,7 +4468,7 @@
                 </a:solidFill>
                 <a:latin typeface="Arial"/>
               </a:rPr>
-              <a:t>Test with a couple of real people; change ONE thing on the evidence, and commit it.</a:t>
+              <a:t>Polish the happy path and get it hosted - a stranger will try it at the showcase.</a:t>
             </a:r>
           </a:p>
         </p:txBody>
@@ -4655,7 +4655,7 @@
                 </a:solidFill>
                 <a:latin typeface="Arial"/>
               </a:rPr>
-              <a:t>Short - and it showcases the artifact</a:t>
+              <a:t>Show the IDEA of your app - authentically</a:t>
             </a:r>
           </a:p>
         </p:txBody>
@@ -4703,7 +4703,7 @@
                 </a:solidFill>
                 <a:latin typeface="Arial"/>
               </a:rPr>
-              <a:t>Make a short pitch that shows your vibe-coded thing in action.</a:t>
+              <a:t>Make a short video that shows the idea of your app.</a:t>
             </a:r>
           </a:p>
           <a:p>
@@ -4728,7 +4728,7 @@
                 </a:solidFill>
                 <a:latin typeface="Arial"/>
               </a:rPr>
-              <a:t>AI video: Google Veo 3.1 (Flow), Runway, Kling, or Pika. (OpenAI retired the Sora app in 2026.)</a:t>
+              <a:t>It does NOT have to be AI: a screen recording, an acted skit, or a hand-animated walkthrough all work.</a:t>
             </a:r>
           </a:p>
           <a:p>
@@ -4753,7 +4753,7 @@
                 </a:solidFill>
                 <a:latin typeface="Arial"/>
               </a:rPr>
-              <a:t>Or an animated walkthrough, or a plain screen recording - the artifact is the star.</a:t>
+              <a:t>AI video is fine too: Google Veo 3.1 (Flow), Runway, Kling, Pika. (OpenAI retired the Sora app in 2026.)</a:t>
             </a:r>
           </a:p>
           <a:p>
@@ -4778,7 +4778,7 @@
                 </a:solidFill>
                 <a:latin typeface="Arial"/>
               </a:rPr>
-              <a:t>Put it in presentation/ and link it in your report.</a:t>
+              <a:t>Pick whatever feels AUTHENTIC to your team. Put it in presentation/ AND embed it in your final slides.</a:t>
             </a:r>
           </a:p>
         </p:txBody>
@@ -5277,7 +5277,7 @@
                 </a:solidFill>
                 <a:latin typeface="Arial"/>
               </a:rPr>
-              <a:t>Five beats on the monitor</a:t>
+              <a:t>Tell the arc of your value - not a test report</a:t>
             </a:r>
           </a:p>
         </p:txBody>
@@ -5325,7 +5325,7 @@
                 </a:solidFill>
                 <a:latin typeface="Arial"/>
               </a:rPr>
-              <a:t>The artifact - a live demo of the happy path.</a:t>
+              <a:t>The artifact - a live demo of the happy path, value living in the design.</a:t>
             </a:r>
           </a:p>
           <a:p>
@@ -5350,7 +5350,7 @@
                 </a:solidFill>
                 <a:latin typeface="Arial"/>
               </a:rPr>
-              <a:t>The value - what it operationalizes, and for whom outside the class.</a:t>
+              <a:t>The value + who - what it operationalizes and for whom, with your PERSONA and STORYBOARD.</a:t>
             </a:r>
           </a:p>
           <a:p>
@@ -5375,7 +5375,7 @@
                 </a:solidFill>
                 <a:latin typeface="Arial"/>
               </a:rPr>
-              <a:t>The evidence - what you tested (Mon usability, Tue value) and what changed.</a:t>
+              <a:t>The journey - your research findings, the design ALTERNATIVES you considered, how the design PROGRESSED from Project 2.</a:t>
             </a:r>
           </a:p>
           <a:p>
@@ -5400,7 +5400,7 @@
                 </a:solidFill>
                 <a:latin typeface="Arial"/>
               </a:rPr>
-              <a:t>The pitch - your video.</a:t>
+              <a:t>The pitch - your embedded video.</a:t>
             </a:r>
           </a:p>
           <a:p>
@@ -6414,7 +6414,7 @@
                 </a:solidFill>
                 <a:latin typeface="Arial"/>
               </a:rPr>
-              <a:t>...and the evening</a:t>
+              <a:t>...and the showcase</a:t>
             </a:r>
           </a:p>
         </p:txBody>
@@ -6541,7 +6541,7 @@
                 </a:solidFill>
                 <a:latin typeface="Courier New"/>
               </a:rPr>
-              <a:t>THU EVE - PRESENT</a:t>
+              <a:t>THU 3-5 - SHOWCASE</a:t>
             </a:r>
           </a:p>
         </p:txBody>
@@ -6619,7 +6619,7 @@
                 </a:solidFill>
                 <a:latin typeface="Arial"/>
               </a:rPr>
-              <a:t>The live demo on the monitors.</a:t>
+              <a:t>The live demo + slides at the afternoon showcase.</a:t>
             </a:r>
           </a:p>
         </p:txBody>
@@ -7029,7 +7029,7 @@
                 </a:solidFill>
                 <a:latin typeface="Arial"/>
               </a:rPr>
-              <a:t>A separate grade for the demo. Peer-check adjusts for unfair contribution.</a:t>
+              <a:t>A separate grade for the showcase. Peer-check adjusts for unfair contribution.</a:t>
             </a:r>
           </a:p>
         </p:txBody>
@@ -7216,7 +7216,7 @@
                 </a:solidFill>
                 <a:latin typeface="Arial"/>
               </a:rPr>
-              <a:t>Demo night</a:t>
+              <a:t>Afternoon showcase (3-5)</a:t>
             </a:r>
           </a:p>
         </p:txBody>
@@ -7255,7 +7255,7 @@
                 </a:solidFill>
                 <a:latin typeface="Arial"/>
               </a:rPr>
-              <a:t>Present on the monitors - prototype + slides. Demo from the HOSTED link, not localhost.</a:t>
+              <a:t>A shared showcase - you present alongside other classes' work, with a keynote for families. Prototype + slides on the monitors; demo from the HOSTED link, not localhost.</a:t>
             </a:r>
           </a:p>
           <a:p>
@@ -7287,7 +7287,7 @@
                 </a:solidFill>
                 <a:latin typeface="Arial"/>
               </a:rPr>
-              <a:t>Keep a screen-recording backup in presentation/ in case the Wi-Fi drops.</a:t>
+              <a:t>Keep a screen-recording backup in presentation/ in case the Wi-Fi drops. Final tweaks + submission can come after the showcase.</a:t>
             </a:r>
           </a:p>
         </p:txBody>

--- a/slides/Week3-Thu-Final-Presentations.pptx
+++ b/slides/Week3-Thu-Final-Presentations.pptx
@@ -4469,6 +4469,31 @@
                 <a:latin typeface="Arial"/>
               </a:rPr>
               <a:t>Polish the happy path and get it hosted - a stranger will try it at the showcase.</a:t>
+            </a:r>
+          </a:p>
+          <a:p>
+            <a:pPr algn="l">
+              <a:lnSpc>
+                <a:spcPct val="112000"/>
+              </a:lnSpc>
+            </a:pPr>
+            <a:r>
+              <a:rPr sz="2000" b="1">
+                <a:solidFill>
+                  <a:srgbClr val="00FF41"/>
+                </a:solidFill>
+                <a:latin typeface="Arial"/>
+              </a:rPr>
+              <a:t>•  </a:t>
+            </a:r>
+            <a:r>
+              <a:rPr sz="2000" b="0">
+                <a:solidFill>
+                  <a:srgbClr val="F5F7FA"/>
+                </a:solidFill>
+                <a:latin typeface="Arial"/>
+              </a:rPr>
+              <a:t>Want an app, not just a site? Wrap it (PWA / Capacitor / Electron) - see Wednesday's 'apps' slides.</a:t>
             </a:r>
           </a:p>
         </p:txBody>
